--- a/app/static/slides_ai_kidsup.pptx
+++ b/app/static/slides_ai_kidsup.pptx
@@ -2805,8 +2805,8 @@
         </p:nvSpPr>
         <p:spPr>
           <a:xfrm>
-            <a:off x="502920" y="365760"/>
-            <a:ext cx="585216" cy="585216"/>
+            <a:off x="502920" y="402336"/>
+            <a:ext cx="603504" cy="603504"/>
           </a:xfrm>
           <a:prstGeom prst="ellipse">
             <a:avLst/>
@@ -2825,8 +2825,8 @@
         </p:nvSpPr>
         <p:spPr>
           <a:xfrm>
-            <a:off x="502920" y="365760"/>
-            <a:ext cx="585216" cy="585216"/>
+            <a:off x="502920" y="402336"/>
+            <a:ext cx="603504" cy="603504"/>
           </a:xfrm>
           <a:prstGeom prst="rect">
             <a:avLst/>
@@ -2864,8 +2864,8 @@
         </p:nvSpPr>
         <p:spPr>
           <a:xfrm>
-            <a:off x="1261872" y="347472"/>
-            <a:ext cx="10332720" cy="274320"/>
+            <a:off x="1261872" y="310896"/>
+            <a:ext cx="10332720" cy="256032"/>
           </a:xfrm>
           <a:prstGeom prst="rect">
             <a:avLst/>
@@ -2903,24 +2903,24 @@
         </p:nvSpPr>
         <p:spPr>
           <a:xfrm>
-            <a:off x="1261872" y="603504"/>
-            <a:ext cx="10424160" cy="512064"/>
-          </a:xfrm>
-          <a:prstGeom prst="rect">
-            <a:avLst/>
-          </a:prstGeom>
-          <a:noFill/>
-          <a:ln/>
-        </p:spPr>
-        <p:txBody>
-          <a:bodyPr wrap="square" lIns="0" tIns="0" rIns="0" bIns="0" rtlCol="0" anchor="ctr"/>
-          <a:lstStyle/>
-          <a:p>
-            <a:pPr indent="0" marL="0">
-              <a:buNone/>
-            </a:pPr>
-            <a:r>
-              <a:rPr lang="en-US" sz="3000" b="1" dirty="0">
+            <a:off x="1261872" y="585216"/>
+            <a:ext cx="10515600" cy="566928"/>
+          </a:xfrm>
+          <a:prstGeom prst="rect">
+            <a:avLst/>
+          </a:prstGeom>
+          <a:noFill/>
+          <a:ln/>
+        </p:spPr>
+        <p:txBody>
+          <a:bodyPr wrap="square" lIns="0" tIns="0" rIns="0" bIns="0" rtlCol="0" anchor="ctr"/>
+          <a:lstStyle/>
+          <a:p>
+            <a:pPr indent="0" marL="0">
+              <a:buNone/>
+            </a:pPr>
+            <a:r>
+              <a:rPr lang="en-US" sz="2800" b="1" dirty="0">
                 <a:solidFill>
                   <a:srgbClr val="312783"/>
                 </a:solidFill>
@@ -2930,7 +2930,7 @@
               </a:rPr>
               <a:t>Находка возвращается тому, кто её сделал</a:t>
             </a:r>
-            <a:endParaRPr lang="en-US" sz="3000" dirty="0"/>
+            <a:endParaRPr lang="en-US" sz="2800" dirty="0"/>
           </a:p>
         </p:txBody>
       </p:sp>
@@ -4464,8 +4464,8 @@
         </p:nvSpPr>
         <p:spPr>
           <a:xfrm>
-            <a:off x="502920" y="365760"/>
-            <a:ext cx="585216" cy="585216"/>
+            <a:off x="502920" y="402336"/>
+            <a:ext cx="603504" cy="603504"/>
           </a:xfrm>
           <a:prstGeom prst="ellipse">
             <a:avLst/>
@@ -4484,8 +4484,8 @@
         </p:nvSpPr>
         <p:spPr>
           <a:xfrm>
-            <a:off x="502920" y="365760"/>
-            <a:ext cx="585216" cy="585216"/>
+            <a:off x="502920" y="402336"/>
+            <a:ext cx="603504" cy="603504"/>
           </a:xfrm>
           <a:prstGeom prst="rect">
             <a:avLst/>
@@ -4523,8 +4523,8 @@
         </p:nvSpPr>
         <p:spPr>
           <a:xfrm>
-            <a:off x="1261872" y="347472"/>
-            <a:ext cx="10332720" cy="274320"/>
+            <a:off x="1261872" y="310896"/>
+            <a:ext cx="10332720" cy="256032"/>
           </a:xfrm>
           <a:prstGeom prst="rect">
             <a:avLst/>
@@ -4562,24 +4562,24 @@
         </p:nvSpPr>
         <p:spPr>
           <a:xfrm>
-            <a:off x="1261872" y="603504"/>
-            <a:ext cx="10424160" cy="512064"/>
-          </a:xfrm>
-          <a:prstGeom prst="rect">
-            <a:avLst/>
-          </a:prstGeom>
-          <a:noFill/>
-          <a:ln/>
-        </p:spPr>
-        <p:txBody>
-          <a:bodyPr wrap="square" lIns="0" tIns="0" rIns="0" bIns="0" rtlCol="0" anchor="ctr"/>
-          <a:lstStyle/>
-          <a:p>
-            <a:pPr indent="0" marL="0">
-              <a:buNone/>
-            </a:pPr>
-            <a:r>
-              <a:rPr lang="en-US" sz="3000" b="1" dirty="0">
+            <a:off x="1261872" y="585216"/>
+            <a:ext cx="10515600" cy="566928"/>
+          </a:xfrm>
+          <a:prstGeom prst="rect">
+            <a:avLst/>
+          </a:prstGeom>
+          <a:noFill/>
+          <a:ln/>
+        </p:spPr>
+        <p:txBody>
+          <a:bodyPr wrap="square" lIns="0" tIns="0" rIns="0" bIns="0" rtlCol="0" anchor="ctr"/>
+          <a:lstStyle/>
+          <a:p>
+            <a:pPr indent="0" marL="0">
+              <a:buNone/>
+            </a:pPr>
+            <a:r>
+              <a:rPr lang="en-US" sz="2800" b="1" dirty="0">
                 <a:solidFill>
                   <a:srgbClr val="312783"/>
                 </a:solidFill>
@@ -4589,7 +4589,7 @@
               </a:rPr>
               <a:t>Пишет методички и регламенты</a:t>
             </a:r>
-            <a:endParaRPr lang="en-US" sz="3000" dirty="0"/>
+            <a:endParaRPr lang="en-US" sz="2800" dirty="0"/>
           </a:p>
         </p:txBody>
       </p:sp>
@@ -5900,8 +5900,8 @@
         </p:nvSpPr>
         <p:spPr>
           <a:xfrm>
-            <a:off x="502920" y="365760"/>
-            <a:ext cx="585216" cy="585216"/>
+            <a:off x="502920" y="402336"/>
+            <a:ext cx="603504" cy="603504"/>
           </a:xfrm>
           <a:prstGeom prst="ellipse">
             <a:avLst/>
@@ -5920,8 +5920,8 @@
         </p:nvSpPr>
         <p:spPr>
           <a:xfrm>
-            <a:off x="502920" y="365760"/>
-            <a:ext cx="585216" cy="585216"/>
+            <a:off x="502920" y="402336"/>
+            <a:ext cx="603504" cy="603504"/>
           </a:xfrm>
           <a:prstGeom prst="rect">
             <a:avLst/>
@@ -5959,8 +5959,8 @@
         </p:nvSpPr>
         <p:spPr>
           <a:xfrm>
-            <a:off x="1261872" y="347472"/>
-            <a:ext cx="10332720" cy="274320"/>
+            <a:off x="1261872" y="310896"/>
+            <a:ext cx="10332720" cy="256032"/>
           </a:xfrm>
           <a:prstGeom prst="rect">
             <a:avLst/>
@@ -5998,24 +5998,24 @@
         </p:nvSpPr>
         <p:spPr>
           <a:xfrm>
-            <a:off x="1261872" y="603504"/>
-            <a:ext cx="10424160" cy="512064"/>
-          </a:xfrm>
-          <a:prstGeom prst="rect">
-            <a:avLst/>
-          </a:prstGeom>
-          <a:noFill/>
-          <a:ln/>
-        </p:spPr>
-        <p:txBody>
-          <a:bodyPr wrap="square" lIns="0" tIns="0" rIns="0" bIns="0" rtlCol="0" anchor="ctr"/>
-          <a:lstStyle/>
-          <a:p>
-            <a:pPr indent="0" marL="0">
-              <a:buNone/>
-            </a:pPr>
-            <a:r>
-              <a:rPr lang="en-US" sz="3000" b="1" dirty="0">
+            <a:off x="1261872" y="585216"/>
+            <a:ext cx="10515600" cy="566928"/>
+          </a:xfrm>
+          <a:prstGeom prst="rect">
+            <a:avLst/>
+          </a:prstGeom>
+          <a:noFill/>
+          <a:ln/>
+        </p:spPr>
+        <p:txBody>
+          <a:bodyPr wrap="square" lIns="0" tIns="0" rIns="0" bIns="0" rtlCol="0" anchor="ctr"/>
+          <a:lstStyle/>
+          <a:p>
+            <a:pPr indent="0" marL="0">
+              <a:buNone/>
+            </a:pPr>
+            <a:r>
+              <a:rPr lang="en-US" sz="2800" b="1" dirty="0">
                 <a:solidFill>
                   <a:srgbClr val="312783"/>
                 </a:solidFill>
@@ -6025,7 +6025,7 @@
               </a:rPr>
               <a:t>Пять историй, которые нашлись за неделю</a:t>
             </a:r>
-            <a:endParaRPr lang="en-US" sz="3000" dirty="0"/>
+            <a:endParaRPr lang="en-US" sz="2800" dirty="0"/>
           </a:p>
         </p:txBody>
       </p:sp>
@@ -6533,24 +6533,24 @@
         </p:nvSpPr>
         <p:spPr>
           <a:xfrm>
-            <a:off x="722376" y="3959352"/>
-            <a:ext cx="1920240" cy="475488"/>
-          </a:xfrm>
-          <a:prstGeom prst="rect">
-            <a:avLst/>
-          </a:prstGeom>
-          <a:noFill/>
-          <a:ln/>
-        </p:spPr>
-        <p:txBody>
-          <a:bodyPr wrap="square" lIns="0" tIns="0" rIns="0" bIns="0" rtlCol="0" anchor="ctr"/>
-          <a:lstStyle/>
-          <a:p>
-            <a:pPr indent="0" marL="0">
-              <a:buNone/>
-            </a:pPr>
-            <a:r>
-              <a:rPr lang="en-US" sz="2600" b="1" dirty="0">
+            <a:off x="722376" y="4133088"/>
+            <a:ext cx="1920240" cy="512064"/>
+          </a:xfrm>
+          <a:prstGeom prst="rect">
+            <a:avLst/>
+          </a:prstGeom>
+          <a:noFill/>
+          <a:ln/>
+        </p:spPr>
+        <p:txBody>
+          <a:bodyPr wrap="square" lIns="0" tIns="0" rIns="0" bIns="0" rtlCol="0" anchor="ctr"/>
+          <a:lstStyle/>
+          <a:p>
+            <a:pPr indent="0" marL="0">
+              <a:buNone/>
+            </a:pPr>
+            <a:r>
+              <a:rPr lang="en-US" sz="2800" b="1" dirty="0">
                 <a:solidFill>
                   <a:srgbClr val="E30613"/>
                 </a:solidFill>
@@ -6560,7 +6560,7 @@
               </a:rPr>
               <a:t>1 844</a:t>
             </a:r>
-            <a:endParaRPr lang="en-US" sz="2600" dirty="0"/>
+            <a:endParaRPr lang="en-US" sz="2800" dirty="0"/>
           </a:p>
         </p:txBody>
       </p:sp>
@@ -6572,24 +6572,24 @@
         </p:nvSpPr>
         <p:spPr>
           <a:xfrm>
-            <a:off x="2697480" y="3959352"/>
-            <a:ext cx="3072384" cy="475488"/>
-          </a:xfrm>
-          <a:prstGeom prst="rect">
-            <a:avLst/>
-          </a:prstGeom>
-          <a:noFill/>
-          <a:ln/>
-        </p:spPr>
-        <p:txBody>
-          <a:bodyPr wrap="square" lIns="0" tIns="0" rIns="0" bIns="0" rtlCol="0" anchor="ctr"/>
-          <a:lstStyle/>
-          <a:p>
-            <a:pPr indent="0" marL="0">
-              <a:buNone/>
-            </a:pPr>
-            <a:r>
-              <a:rPr lang="en-US" sz="1300" b="1" dirty="0">
+            <a:off x="2697480" y="4133088"/>
+            <a:ext cx="3072384" cy="512064"/>
+          </a:xfrm>
+          <a:prstGeom prst="rect">
+            <a:avLst/>
+          </a:prstGeom>
+          <a:noFill/>
+          <a:ln/>
+        </p:spPr>
+        <p:txBody>
+          <a:bodyPr wrap="square" lIns="0" tIns="0" rIns="0" bIns="0" rtlCol="0" anchor="ctr"/>
+          <a:lstStyle/>
+          <a:p>
+            <a:pPr indent="0" marL="0">
+              <a:buNone/>
+            </a:pPr>
+            <a:r>
+              <a:rPr lang="en-US" sz="1350" b="1" dirty="0">
                 <a:solidFill>
                   <a:srgbClr val="312783"/>
                 </a:solidFill>
@@ -6599,7 +6599,7 @@
               </a:rPr>
               <a:t>карточки затёрты одной операцией</a:t>
             </a:r>
-            <a:endParaRPr lang="en-US" sz="1300" dirty="0"/>
+            <a:endParaRPr lang="en-US" sz="1350" dirty="0"/>
           </a:p>
         </p:txBody>
       </p:sp>
@@ -6611,8 +6611,8 @@
         </p:nvSpPr>
         <p:spPr>
           <a:xfrm>
-            <a:off x="722376" y="4517136"/>
-            <a:ext cx="5047488" cy="1389888"/>
+            <a:off x="722376" y="4754880"/>
+            <a:ext cx="5047488" cy="1051560"/>
           </a:xfrm>
           <a:prstGeom prst="rect">
             <a:avLst/>
@@ -6626,12 +6626,12 @@
           <a:p>
             <a:pPr indent="0" marL="0">
               <a:lnSpc>
-                <a:spcPct val="100000"/>
+                <a:spcPct val="106000"/>
               </a:lnSpc>
               <a:buNone/>
             </a:pPr>
             <a:r>
-              <a:rPr lang="en-US" sz="1100" dirty="0">
+              <a:rPr lang="en-US" sz="1150" dirty="0">
                 <a:solidFill>
                   <a:srgbClr val="45415F"/>
                 </a:solidFill>
@@ -6641,7 +6641,7 @@
               </a:rPr>
               <a:t>14 августа массовая смена статусов снесла телефоны, родителей и историю у 1 844 карточек. Восстановили. Теперь единственный разрешённый способ правки — сначала прочитать карточку, наложить изменения и отправить целиком.</a:t>
             </a:r>
-            <a:endParaRPr lang="en-US" sz="1100" dirty="0"/>
+            <a:endParaRPr lang="en-US" sz="1150" dirty="0"/>
           </a:p>
         </p:txBody>
       </p:sp>
@@ -6687,24 +6687,24 @@
         </p:nvSpPr>
         <p:spPr>
           <a:xfrm>
-            <a:off x="6419088" y="3959352"/>
-            <a:ext cx="1920240" cy="475488"/>
-          </a:xfrm>
-          <a:prstGeom prst="rect">
-            <a:avLst/>
-          </a:prstGeom>
-          <a:noFill/>
-          <a:ln/>
-        </p:spPr>
-        <p:txBody>
-          <a:bodyPr wrap="square" lIns="0" tIns="0" rIns="0" bIns="0" rtlCol="0" anchor="ctr"/>
-          <a:lstStyle/>
-          <a:p>
-            <a:pPr indent="0" marL="0">
-              <a:buNone/>
-            </a:pPr>
-            <a:r>
-              <a:rPr lang="en-US" sz="2600" b="1" dirty="0">
+            <a:off x="6419088" y="4133088"/>
+            <a:ext cx="1920240" cy="512064"/>
+          </a:xfrm>
+          <a:prstGeom prst="rect">
+            <a:avLst/>
+          </a:prstGeom>
+          <a:noFill/>
+          <a:ln/>
+        </p:spPr>
+        <p:txBody>
+          <a:bodyPr wrap="square" lIns="0" tIns="0" rIns="0" bIns="0" rtlCol="0" anchor="ctr"/>
+          <a:lstStyle/>
+          <a:p>
+            <a:pPr indent="0" marL="0">
+              <a:buNone/>
+            </a:pPr>
+            <a:r>
+              <a:rPr lang="en-US" sz="2800" b="1" dirty="0">
                 <a:solidFill>
                   <a:srgbClr val="F59C00"/>
                 </a:solidFill>
@@ -6714,7 +6714,7 @@
               </a:rPr>
               <a:t>20 часов</a:t>
             </a:r>
-            <a:endParaRPr lang="en-US" sz="2600" dirty="0"/>
+            <a:endParaRPr lang="en-US" sz="2800" dirty="0"/>
           </a:p>
         </p:txBody>
       </p:sp>
@@ -6726,24 +6726,24 @@
         </p:nvSpPr>
         <p:spPr>
           <a:xfrm>
-            <a:off x="8394192" y="3959352"/>
-            <a:ext cx="3072384" cy="475488"/>
-          </a:xfrm>
-          <a:prstGeom prst="rect">
-            <a:avLst/>
-          </a:prstGeom>
-          <a:noFill/>
-          <a:ln/>
-        </p:spPr>
-        <p:txBody>
-          <a:bodyPr wrap="square" lIns="0" tIns="0" rIns="0" bIns="0" rtlCol="0" anchor="ctr"/>
-          <a:lstStyle/>
-          <a:p>
-            <a:pPr indent="0" marL="0">
-              <a:buNone/>
-            </a:pPr>
-            <a:r>
-              <a:rPr lang="en-US" sz="1300" b="1" dirty="0">
+            <a:off x="8394192" y="4133088"/>
+            <a:ext cx="3072384" cy="512064"/>
+          </a:xfrm>
+          <a:prstGeom prst="rect">
+            <a:avLst/>
+          </a:prstGeom>
+          <a:noFill/>
+          <a:ln/>
+        </p:spPr>
+        <p:txBody>
+          <a:bodyPr wrap="square" lIns="0" tIns="0" rIns="0" bIns="0" rtlCol="0" anchor="ctr"/>
+          <a:lstStyle/>
+          <a:p>
+            <a:pPr indent="0" marL="0">
+              <a:buNone/>
+            </a:pPr>
+            <a:r>
+              <a:rPr lang="en-US" sz="1350" b="1" dirty="0">
                 <a:solidFill>
                   <a:srgbClr val="312783"/>
                 </a:solidFill>
@@ -6753,7 +6753,7 @@
               </a:rPr>
               <a:t>невидимой переписки</a:t>
             </a:r>
-            <a:endParaRPr lang="en-US" sz="1300" dirty="0"/>
+            <a:endParaRPr lang="en-US" sz="1350" dirty="0"/>
           </a:p>
         </p:txBody>
       </p:sp>
@@ -6765,8 +6765,8 @@
         </p:nvSpPr>
         <p:spPr>
           <a:xfrm>
-            <a:off x="6419088" y="4517136"/>
-            <a:ext cx="5047488" cy="1389888"/>
+            <a:off x="6419088" y="4754880"/>
+            <a:ext cx="5047488" cy="1051560"/>
           </a:xfrm>
           <a:prstGeom prst="rect">
             <a:avLst/>
@@ -6780,12 +6780,12 @@
           <a:p>
             <a:pPr indent="0" marL="0">
               <a:lnSpc>
-                <a:spcPct val="100000"/>
+                <a:spcPct val="106000"/>
               </a:lnSpc>
               <a:buNone/>
             </a:pPr>
             <a:r>
-              <a:rPr lang="en-US" sz="1100" dirty="0">
+              <a:rPr lang="en-US" sz="1150" dirty="0">
                 <a:solidFill>
                   <a:srgbClr val="45415F"/>
                 </a:solidFill>
@@ -6795,7 +6795,7 @@
               </a:rPr>
               <a:t>Интеграция молча перезаписала адрес вебхука мессенджеров: события пропали в 13:02 и не приходили двадцать часов. Заметили только со слов админов. Теперь сторож проверяет каждые полчаса, чинит сам и пишет владельцу.</a:t>
             </a:r>
-            <a:endParaRPr lang="en-US" sz="1100" dirty="0"/>
+            <a:endParaRPr lang="en-US" sz="1150" dirty="0"/>
           </a:p>
         </p:txBody>
       </p:sp>
@@ -6832,8 +6832,8 @@
         </p:nvSpPr>
         <p:spPr>
           <a:xfrm>
-            <a:off x="502920" y="365760"/>
-            <a:ext cx="585216" cy="585216"/>
+            <a:off x="502920" y="402336"/>
+            <a:ext cx="603504" cy="603504"/>
           </a:xfrm>
           <a:prstGeom prst="ellipse">
             <a:avLst/>
@@ -6852,8 +6852,8 @@
         </p:nvSpPr>
         <p:spPr>
           <a:xfrm>
-            <a:off x="502920" y="365760"/>
-            <a:ext cx="585216" cy="585216"/>
+            <a:off x="502920" y="402336"/>
+            <a:ext cx="603504" cy="603504"/>
           </a:xfrm>
           <a:prstGeom prst="rect">
             <a:avLst/>
@@ -6891,8 +6891,8 @@
         </p:nvSpPr>
         <p:spPr>
           <a:xfrm>
-            <a:off x="1261872" y="347472"/>
-            <a:ext cx="10332720" cy="274320"/>
+            <a:off x="1261872" y="310896"/>
+            <a:ext cx="10332720" cy="256032"/>
           </a:xfrm>
           <a:prstGeom prst="rect">
             <a:avLst/>
@@ -6930,24 +6930,24 @@
         </p:nvSpPr>
         <p:spPr>
           <a:xfrm>
-            <a:off x="1261872" y="603504"/>
-            <a:ext cx="10424160" cy="512064"/>
-          </a:xfrm>
-          <a:prstGeom prst="rect">
-            <a:avLst/>
-          </a:prstGeom>
-          <a:noFill/>
-          <a:ln/>
-        </p:spPr>
-        <p:txBody>
-          <a:bodyPr wrap="square" lIns="0" tIns="0" rIns="0" bIns="0" rtlCol="0" anchor="ctr"/>
-          <a:lstStyle/>
-          <a:p>
-            <a:pPr indent="0" marL="0">
-              <a:buNone/>
-            </a:pPr>
-            <a:r>
-              <a:rPr lang="en-US" sz="3000" b="1" dirty="0">
+            <a:off x="1261872" y="585216"/>
+            <a:ext cx="10515600" cy="566928"/>
+          </a:xfrm>
+          <a:prstGeom prst="rect">
+            <a:avLst/>
+          </a:prstGeom>
+          <a:noFill/>
+          <a:ln/>
+        </p:spPr>
+        <p:txBody>
+          <a:bodyPr wrap="square" lIns="0" tIns="0" rIns="0" bIns="0" rtlCol="0" anchor="ctr"/>
+          <a:lstStyle/>
+          <a:p>
+            <a:pPr indent="0" marL="0">
+              <a:buNone/>
+            </a:pPr>
+            <a:r>
+              <a:rPr lang="en-US" sz="2800" b="1" dirty="0">
                 <a:solidFill>
                   <a:srgbClr val="312783"/>
                 </a:solidFill>
@@ -6957,7 +6957,7 @@
               </a:rPr>
               <a:t>Что это дало в деньгах и часах</a:t>
             </a:r>
-            <a:endParaRPr lang="en-US" sz="3000" dirty="0"/>
+            <a:endParaRPr lang="en-US" sz="2800" dirty="0"/>
           </a:p>
         </p:txBody>
       </p:sp>
@@ -7808,8 +7808,8 @@
         </p:nvSpPr>
         <p:spPr>
           <a:xfrm>
-            <a:off x="502920" y="365760"/>
-            <a:ext cx="585216" cy="585216"/>
+            <a:off x="502920" y="402336"/>
+            <a:ext cx="603504" cy="603504"/>
           </a:xfrm>
           <a:prstGeom prst="ellipse">
             <a:avLst/>
@@ -7828,8 +7828,8 @@
         </p:nvSpPr>
         <p:spPr>
           <a:xfrm>
-            <a:off x="502920" y="365760"/>
-            <a:ext cx="585216" cy="585216"/>
+            <a:off x="502920" y="402336"/>
+            <a:ext cx="603504" cy="603504"/>
           </a:xfrm>
           <a:prstGeom prst="rect">
             <a:avLst/>
@@ -7867,8 +7867,8 @@
         </p:nvSpPr>
         <p:spPr>
           <a:xfrm>
-            <a:off x="1261872" y="347472"/>
-            <a:ext cx="10332720" cy="274320"/>
+            <a:off x="1261872" y="310896"/>
+            <a:ext cx="10332720" cy="256032"/>
           </a:xfrm>
           <a:prstGeom prst="rect">
             <a:avLst/>
@@ -7906,24 +7906,24 @@
         </p:nvSpPr>
         <p:spPr>
           <a:xfrm>
-            <a:off x="1261872" y="603504"/>
-            <a:ext cx="10424160" cy="512064"/>
-          </a:xfrm>
-          <a:prstGeom prst="rect">
-            <a:avLst/>
-          </a:prstGeom>
-          <a:noFill/>
-          <a:ln/>
-        </p:spPr>
-        <p:txBody>
-          <a:bodyPr wrap="square" lIns="0" tIns="0" rIns="0" bIns="0" rtlCol="0" anchor="ctr"/>
-          <a:lstStyle/>
-          <a:p>
-            <a:pPr indent="0" marL="0">
-              <a:buNone/>
-            </a:pPr>
-            <a:r>
-              <a:rPr lang="en-US" sz="3000" b="1" dirty="0">
+            <a:off x="1261872" y="585216"/>
+            <a:ext cx="10515600" cy="566928"/>
+          </a:xfrm>
+          <a:prstGeom prst="rect">
+            <a:avLst/>
+          </a:prstGeom>
+          <a:noFill/>
+          <a:ln/>
+        </p:spPr>
+        <p:txBody>
+          <a:bodyPr wrap="square" lIns="0" tIns="0" rIns="0" bIns="0" rtlCol="0" anchor="ctr"/>
+          <a:lstStyle/>
+          <a:p>
+            <a:pPr indent="0" marL="0">
+              <a:buNone/>
+            </a:pPr>
+            <a:r>
+              <a:rPr lang="en-US" sz="2800" b="1" dirty="0">
                 <a:solidFill>
                   <a:srgbClr val="FFFFFF"/>
                 </a:solidFill>
@@ -7933,7 +7933,7 @@
               </a:rPr>
               <a:t>Чего ИИ-сотрудник не делает принципиально</a:t>
             </a:r>
-            <a:endParaRPr lang="en-US" sz="3000" dirty="0"/>
+            <a:endParaRPr lang="en-US" sz="2800" dirty="0"/>
           </a:p>
         </p:txBody>
       </p:sp>
@@ -7945,12 +7945,12 @@
         </p:nvSpPr>
         <p:spPr>
           <a:xfrm>
-            <a:off x="502920" y="1600200"/>
-            <a:ext cx="3593592" cy="2697480"/>
+            <a:off x="502920" y="1572768"/>
+            <a:ext cx="3593592" cy="2560320"/>
           </a:xfrm>
           <a:prstGeom prst="roundRect">
             <a:avLst>
-              <a:gd name="adj" fmla="val 3390"/>
+              <a:gd name="adj" fmla="val 3571"/>
             </a:avLst>
           </a:prstGeom>
           <a:solidFill>
@@ -7974,7 +7974,7 @@
         </p:nvSpPr>
         <p:spPr>
           <a:xfrm>
-            <a:off x="722376" y="1810512"/>
+            <a:off x="722376" y="1783080"/>
             <a:ext cx="420624" cy="420624"/>
           </a:xfrm>
           <a:prstGeom prst="ellipse">
@@ -7994,7 +7994,7 @@
         </p:nvSpPr>
         <p:spPr>
           <a:xfrm>
-            <a:off x="722376" y="1810512"/>
+            <a:off x="722376" y="1783080"/>
             <a:ext cx="420624" cy="420624"/>
           </a:xfrm>
           <a:prstGeom prst="rect">
@@ -8033,7 +8033,7 @@
         </p:nvSpPr>
         <p:spPr>
           <a:xfrm>
-            <a:off x="722376" y="2340864"/>
+            <a:off x="722376" y="2304288"/>
             <a:ext cx="3154680" cy="548640"/>
           </a:xfrm>
           <a:prstGeom prst="rect">
@@ -8075,8 +8075,8 @@
         </p:nvSpPr>
         <p:spPr>
           <a:xfrm>
-            <a:off x="722376" y="2926080"/>
-            <a:ext cx="3154680" cy="1234440"/>
+            <a:off x="722376" y="2889504"/>
+            <a:ext cx="3154680" cy="1115568"/>
           </a:xfrm>
           <a:prstGeom prst="rect">
             <a:avLst/>
@@ -8090,7 +8090,7 @@
           <a:p>
             <a:pPr indent="0" marL="0">
               <a:lnSpc>
-                <a:spcPct val="100000"/>
+                <a:spcPct val="102000"/>
               </a:lnSpc>
               <a:buNone/>
             </a:pPr>
@@ -8117,12 +8117,12 @@
         </p:nvSpPr>
         <p:spPr>
           <a:xfrm>
-            <a:off x="4297680" y="1600200"/>
-            <a:ext cx="3593592" cy="2697480"/>
+            <a:off x="4297680" y="1572768"/>
+            <a:ext cx="3593592" cy="2560320"/>
           </a:xfrm>
           <a:prstGeom prst="roundRect">
             <a:avLst>
-              <a:gd name="adj" fmla="val 3390"/>
+              <a:gd name="adj" fmla="val 3571"/>
             </a:avLst>
           </a:prstGeom>
           <a:solidFill>
@@ -8146,7 +8146,7 @@
         </p:nvSpPr>
         <p:spPr>
           <a:xfrm>
-            <a:off x="4517136" y="1810512"/>
+            <a:off x="4517136" y="1783080"/>
             <a:ext cx="420624" cy="420624"/>
           </a:xfrm>
           <a:prstGeom prst="ellipse">
@@ -8166,7 +8166,7 @@
         </p:nvSpPr>
         <p:spPr>
           <a:xfrm>
-            <a:off x="4517136" y="1810512"/>
+            <a:off x="4517136" y="1783080"/>
             <a:ext cx="420624" cy="420624"/>
           </a:xfrm>
           <a:prstGeom prst="rect">
@@ -8205,7 +8205,7 @@
         </p:nvSpPr>
         <p:spPr>
           <a:xfrm>
-            <a:off x="4517136" y="2340864"/>
+            <a:off x="4517136" y="2304288"/>
             <a:ext cx="3154680" cy="548640"/>
           </a:xfrm>
           <a:prstGeom prst="rect">
@@ -8247,8 +8247,8 @@
         </p:nvSpPr>
         <p:spPr>
           <a:xfrm>
-            <a:off x="4517136" y="2926080"/>
-            <a:ext cx="3154680" cy="1234440"/>
+            <a:off x="4517136" y="2889504"/>
+            <a:ext cx="3154680" cy="1115568"/>
           </a:xfrm>
           <a:prstGeom prst="rect">
             <a:avLst/>
@@ -8262,7 +8262,7 @@
           <a:p>
             <a:pPr indent="0" marL="0">
               <a:lnSpc>
-                <a:spcPct val="100000"/>
+                <a:spcPct val="102000"/>
               </a:lnSpc>
               <a:buNone/>
             </a:pPr>
@@ -8289,12 +8289,12 @@
         </p:nvSpPr>
         <p:spPr>
           <a:xfrm>
-            <a:off x="8092440" y="1600200"/>
-            <a:ext cx="3593592" cy="2697480"/>
+            <a:off x="8092440" y="1572768"/>
+            <a:ext cx="3593592" cy="2560320"/>
           </a:xfrm>
           <a:prstGeom prst="roundRect">
             <a:avLst>
-              <a:gd name="adj" fmla="val 3390"/>
+              <a:gd name="adj" fmla="val 3571"/>
             </a:avLst>
           </a:prstGeom>
           <a:solidFill>
@@ -8318,7 +8318,7 @@
         </p:nvSpPr>
         <p:spPr>
           <a:xfrm>
-            <a:off x="8311896" y="1810512"/>
+            <a:off x="8311896" y="1783080"/>
             <a:ext cx="420624" cy="420624"/>
           </a:xfrm>
           <a:prstGeom prst="ellipse">
@@ -8338,7 +8338,7 @@
         </p:nvSpPr>
         <p:spPr>
           <a:xfrm>
-            <a:off x="8311896" y="1810512"/>
+            <a:off x="8311896" y="1783080"/>
             <a:ext cx="420624" cy="420624"/>
           </a:xfrm>
           <a:prstGeom prst="rect">
@@ -8377,7 +8377,7 @@
         </p:nvSpPr>
         <p:spPr>
           <a:xfrm>
-            <a:off x="8311896" y="2340864"/>
+            <a:off x="8311896" y="2304288"/>
             <a:ext cx="3154680" cy="548640"/>
           </a:xfrm>
           <a:prstGeom prst="rect">
@@ -8419,8 +8419,8 @@
         </p:nvSpPr>
         <p:spPr>
           <a:xfrm>
-            <a:off x="8311896" y="2926080"/>
-            <a:ext cx="3154680" cy="1234440"/>
+            <a:off x="8311896" y="2889504"/>
+            <a:ext cx="3154680" cy="1115568"/>
           </a:xfrm>
           <a:prstGeom prst="rect">
             <a:avLst/>
@@ -8434,7 +8434,7 @@
           <a:p>
             <a:pPr indent="0" marL="0">
               <a:lnSpc>
-                <a:spcPct val="100000"/>
+                <a:spcPct val="102000"/>
               </a:lnSpc>
               <a:buNone/>
             </a:pPr>
@@ -8461,7 +8461,7 @@
         </p:nvSpPr>
         <p:spPr>
           <a:xfrm>
-            <a:off x="1005840" y="4617720"/>
+            <a:off x="1005840" y="4434840"/>
             <a:ext cx="10177272" cy="1234440"/>
           </a:xfrm>
           <a:prstGeom prst="rect">
@@ -8500,7 +8500,7 @@
         </p:nvSpPr>
         <p:spPr>
           <a:xfrm>
-            <a:off x="1005840" y="5870448"/>
+            <a:off x="1005840" y="5760720"/>
             <a:ext cx="10177272" cy="365760"/>
           </a:xfrm>
           <a:prstGeom prst="rect">
@@ -8564,8 +8564,8 @@
         </p:nvSpPr>
         <p:spPr>
           <a:xfrm>
-            <a:off x="502920" y="365760"/>
-            <a:ext cx="585216" cy="585216"/>
+            <a:off x="502920" y="402336"/>
+            <a:ext cx="603504" cy="603504"/>
           </a:xfrm>
           <a:prstGeom prst="ellipse">
             <a:avLst/>
@@ -8584,8 +8584,8 @@
         </p:nvSpPr>
         <p:spPr>
           <a:xfrm>
-            <a:off x="502920" y="365760"/>
-            <a:ext cx="585216" cy="585216"/>
+            <a:off x="502920" y="402336"/>
+            <a:ext cx="603504" cy="603504"/>
           </a:xfrm>
           <a:prstGeom prst="rect">
             <a:avLst/>
@@ -8623,8 +8623,8 @@
         </p:nvSpPr>
         <p:spPr>
           <a:xfrm>
-            <a:off x="1261872" y="347472"/>
-            <a:ext cx="10332720" cy="274320"/>
+            <a:off x="1261872" y="310896"/>
+            <a:ext cx="10332720" cy="256032"/>
           </a:xfrm>
           <a:prstGeom prst="rect">
             <a:avLst/>
@@ -8662,24 +8662,24 @@
         </p:nvSpPr>
         <p:spPr>
           <a:xfrm>
-            <a:off x="1261872" y="603504"/>
-            <a:ext cx="10424160" cy="512064"/>
-          </a:xfrm>
-          <a:prstGeom prst="rect">
-            <a:avLst/>
-          </a:prstGeom>
-          <a:noFill/>
-          <a:ln/>
-        </p:spPr>
-        <p:txBody>
-          <a:bodyPr wrap="square" lIns="0" tIns="0" rIns="0" bIns="0" rtlCol="0" anchor="ctr"/>
-          <a:lstStyle/>
-          <a:p>
-            <a:pPr indent="0" marL="0">
-              <a:buNone/>
-            </a:pPr>
-            <a:r>
-              <a:rPr lang="en-US" sz="3000" b="1" dirty="0">
+            <a:off x="1261872" y="585216"/>
+            <a:ext cx="10515600" cy="566928"/>
+          </a:xfrm>
+          <a:prstGeom prst="rect">
+            <a:avLst/>
+          </a:prstGeom>
+          <a:noFill/>
+          <a:ln/>
+        </p:spPr>
+        <p:txBody>
+          <a:bodyPr wrap="square" lIns="0" tIns="0" rIns="0" bIns="0" rtlCol="0" anchor="ctr"/>
+          <a:lstStyle/>
+          <a:p>
+            <a:pPr indent="0" marL="0">
+              <a:buNone/>
+            </a:pPr>
+            <a:r>
+              <a:rPr lang="en-US" sz="2800" b="1" dirty="0">
                 <a:solidFill>
                   <a:srgbClr val="312783"/>
                 </a:solidFill>
@@ -8687,9 +8687,9 @@
                 <a:ea typeface="Calibri" pitchFamily="34" charset="-122"/>
                 <a:cs typeface="Calibri" pitchFamily="34" charset="-120"/>
               </a:rPr>
-              <a:t>ИИ ошибается. Важно, что происходит дальше</a:t>
-            </a:r>
-            <a:endParaRPr lang="en-US" sz="3000" dirty="0"/>
+              <a:t>ИИ ошибается — важно, что происходит дальше</a:t>
+            </a:r>
+            <a:endParaRPr lang="en-US" sz="2800" dirty="0"/>
           </a:p>
         </p:txBody>
       </p:sp>
@@ -9664,8 +9664,8 @@
         </p:nvSpPr>
         <p:spPr>
           <a:xfrm>
-            <a:off x="502920" y="365760"/>
-            <a:ext cx="585216" cy="585216"/>
+            <a:off x="502920" y="402336"/>
+            <a:ext cx="603504" cy="603504"/>
           </a:xfrm>
           <a:prstGeom prst="ellipse">
             <a:avLst/>
@@ -9684,8 +9684,8 @@
         </p:nvSpPr>
         <p:spPr>
           <a:xfrm>
-            <a:off x="502920" y="365760"/>
-            <a:ext cx="585216" cy="585216"/>
+            <a:off x="502920" y="402336"/>
+            <a:ext cx="603504" cy="603504"/>
           </a:xfrm>
           <a:prstGeom prst="rect">
             <a:avLst/>
@@ -9723,8 +9723,8 @@
         </p:nvSpPr>
         <p:spPr>
           <a:xfrm>
-            <a:off x="1261872" y="347472"/>
-            <a:ext cx="10332720" cy="274320"/>
+            <a:off x="1261872" y="310896"/>
+            <a:ext cx="10332720" cy="256032"/>
           </a:xfrm>
           <a:prstGeom prst="rect">
             <a:avLst/>
@@ -9762,24 +9762,24 @@
         </p:nvSpPr>
         <p:spPr>
           <a:xfrm>
-            <a:off x="1261872" y="603504"/>
-            <a:ext cx="10424160" cy="512064"/>
-          </a:xfrm>
-          <a:prstGeom prst="rect">
-            <a:avLst/>
-          </a:prstGeom>
-          <a:noFill/>
-          <a:ln/>
-        </p:spPr>
-        <p:txBody>
-          <a:bodyPr wrap="square" lIns="0" tIns="0" rIns="0" bIns="0" rtlCol="0" anchor="ctr"/>
-          <a:lstStyle/>
-          <a:p>
-            <a:pPr indent="0" marL="0">
-              <a:buNone/>
-            </a:pPr>
-            <a:r>
-              <a:rPr lang="en-US" sz="3000" b="1" dirty="0">
+            <a:off x="1261872" y="585216"/>
+            <a:ext cx="10515600" cy="566928"/>
+          </a:xfrm>
+          <a:prstGeom prst="rect">
+            <a:avLst/>
+          </a:prstGeom>
+          <a:noFill/>
+          <a:ln/>
+        </p:spPr>
+        <p:txBody>
+          <a:bodyPr wrap="square" lIns="0" tIns="0" rIns="0" bIns="0" rtlCol="0" anchor="ctr"/>
+          <a:lstStyle/>
+          <a:p>
+            <a:pPr indent="0" marL="0">
+              <a:buNone/>
+            </a:pPr>
+            <a:r>
+              <a:rPr lang="en-US" sz="2800" b="1" dirty="0">
                 <a:solidFill>
                   <a:srgbClr val="312783"/>
                 </a:solidFill>
@@ -9789,7 +9789,7 @@
               </a:rPr>
               <a:t>С чего начать у себя</a:t>
             </a:r>
-            <a:endParaRPr lang="en-US" sz="3000" dirty="0"/>
+            <a:endParaRPr lang="en-US" sz="2800" dirty="0"/>
           </a:p>
         </p:txBody>
       </p:sp>
@@ -11024,8 +11024,8 @@
         </p:nvSpPr>
         <p:spPr>
           <a:xfrm>
-            <a:off x="777240" y="1965960"/>
-            <a:ext cx="10607040" cy="2148840"/>
+            <a:off x="777240" y="1920240"/>
+            <a:ext cx="10607040" cy="2240280"/>
           </a:xfrm>
           <a:prstGeom prst="rect">
             <a:avLst/>
@@ -11039,12 +11039,12 @@
           <a:p>
             <a:pPr indent="0" marL="0">
               <a:lnSpc>
-                <a:spcPct val="106000"/>
+                <a:spcPct val="110000"/>
               </a:lnSpc>
               <a:buNone/>
             </a:pPr>
             <a:r>
-              <a:rPr lang="en-US" sz="3300" b="1" dirty="0">
+              <a:rPr lang="en-US" sz="2900" b="1" dirty="0">
                 <a:solidFill>
                   <a:srgbClr val="FFFFFF"/>
                 </a:solidFill>
@@ -11054,17 +11054,17 @@
               </a:rPr>
               <a:t>ИИ-сотрудник не заменяет администратора.</a:t>
             </a:r>
-            <a:endParaRPr lang="en-US" sz="3300" dirty="0"/>
+            <a:endParaRPr lang="en-US" sz="2900" dirty="0"/>
           </a:p>
           <a:p>
             <a:pPr indent="0" marL="0">
               <a:lnSpc>
-                <a:spcPct val="106000"/>
+                <a:spcPct val="110000"/>
               </a:lnSpc>
               <a:buNone/>
             </a:pPr>
             <a:r>
-              <a:rPr lang="en-US" sz="3300" b="1" dirty="0">
+              <a:rPr lang="en-US" sz="2900" b="1" dirty="0">
                 <a:solidFill>
                   <a:srgbClr val="FFFFFF"/>
                 </a:solidFill>
@@ -11074,17 +11074,17 @@
               </a:rPr>
               <a:t>Он забирает у него память — и возвращает</a:t>
             </a:r>
-            <a:endParaRPr lang="en-US" sz="3300" dirty="0"/>
+            <a:endParaRPr lang="en-US" sz="2900" dirty="0"/>
           </a:p>
           <a:p>
             <a:pPr indent="0" marL="0">
               <a:lnSpc>
-                <a:spcPct val="106000"/>
+                <a:spcPct val="110000"/>
               </a:lnSpc>
               <a:buNone/>
             </a:pPr>
             <a:r>
-              <a:rPr lang="en-US" sz="3300" b="1" dirty="0">
+              <a:rPr lang="en-US" sz="2900" b="1" dirty="0">
                 <a:solidFill>
                   <a:srgbClr val="FFFFFF"/>
                 </a:solidFill>
@@ -11094,7 +11094,7 @@
               </a:rPr>
               <a:t>время на разговор с родителем.</a:t>
             </a:r>
-            <a:endParaRPr lang="en-US" sz="3300" dirty="0"/>
+            <a:endParaRPr lang="en-US" sz="2900" dirty="0"/>
           </a:p>
         </p:txBody>
       </p:sp>
@@ -11335,7 +11335,7 @@
                 <a:ea typeface="Calibri" pitchFamily="34" charset="-122"/>
                 <a:cs typeface="Calibri" pitchFamily="34" charset="-120"/>
               </a:rPr>
-              <a:t>2 минуты от м. Бульвар Рокоссовского</a:t>
+              <a:t>2 минуты от метро</a:t>
             </a:r>
             <a:endParaRPr lang="en-US" sz="1250" dirty="0"/>
           </a:p>
@@ -11413,8 +11413,8 @@
         </p:nvSpPr>
         <p:spPr>
           <a:xfrm>
-            <a:off x="502920" y="365760"/>
-            <a:ext cx="585216" cy="585216"/>
+            <a:off x="502920" y="402336"/>
+            <a:ext cx="603504" cy="603504"/>
           </a:xfrm>
           <a:prstGeom prst="ellipse">
             <a:avLst/>
@@ -11433,8 +11433,8 @@
         </p:nvSpPr>
         <p:spPr>
           <a:xfrm>
-            <a:off x="502920" y="365760"/>
-            <a:ext cx="585216" cy="585216"/>
+            <a:off x="502920" y="402336"/>
+            <a:ext cx="603504" cy="603504"/>
           </a:xfrm>
           <a:prstGeom prst="rect">
             <a:avLst/>
@@ -11472,8 +11472,8 @@
         </p:nvSpPr>
         <p:spPr>
           <a:xfrm>
-            <a:off x="1261872" y="347472"/>
-            <a:ext cx="10332720" cy="274320"/>
+            <a:off x="1261872" y="310896"/>
+            <a:ext cx="10332720" cy="256032"/>
           </a:xfrm>
           <a:prstGeom prst="rect">
             <a:avLst/>
@@ -11511,24 +11511,24 @@
         </p:nvSpPr>
         <p:spPr>
           <a:xfrm>
-            <a:off x="1261872" y="603504"/>
-            <a:ext cx="10424160" cy="512064"/>
-          </a:xfrm>
-          <a:prstGeom prst="rect">
-            <a:avLst/>
-          </a:prstGeom>
-          <a:noFill/>
-          <a:ln/>
-        </p:spPr>
-        <p:txBody>
-          <a:bodyPr wrap="square" lIns="0" tIns="0" rIns="0" bIns="0" rtlCol="0" anchor="ctr"/>
-          <a:lstStyle/>
-          <a:p>
-            <a:pPr indent="0" marL="0">
-              <a:buNone/>
-            </a:pPr>
-            <a:r>
-              <a:rPr lang="en-US" sz="3000" b="1" dirty="0">
+            <a:off x="1261872" y="585216"/>
+            <a:ext cx="10515600" cy="566928"/>
+          </a:xfrm>
+          <a:prstGeom prst="rect">
+            <a:avLst/>
+          </a:prstGeom>
+          <a:noFill/>
+          <a:ln/>
+        </p:spPr>
+        <p:txBody>
+          <a:bodyPr wrap="square" lIns="0" tIns="0" rIns="0" bIns="0" rtlCol="0" anchor="ctr"/>
+          <a:lstStyle/>
+          <a:p>
+            <a:pPr indent="0" marL="0">
+              <a:buNone/>
+            </a:pPr>
+            <a:r>
+              <a:rPr lang="en-US" sz="2800" b="1" dirty="0">
                 <a:solidFill>
                   <a:srgbClr val="312783"/>
                 </a:solidFill>
@@ -11538,7 +11538,7 @@
               </a:rPr>
               <a:t>Набор идёт — а держится он на памяти</a:t>
             </a:r>
-            <a:endParaRPr lang="en-US" sz="3000" dirty="0"/>
+            <a:endParaRPr lang="en-US" sz="2800" dirty="0"/>
           </a:p>
         </p:txBody>
       </p:sp>
@@ -11624,7 +11624,7 @@
         <p:spPr>
           <a:xfrm>
             <a:off x="777240" y="2084832"/>
-            <a:ext cx="5074920" cy="3977640"/>
+            <a:ext cx="5074920" cy="3017520"/>
           </a:xfrm>
           <a:prstGeom prst="rect">
             <a:avLst/>
@@ -11760,6 +11760,72 @@
       <p:sp>
         <p:nvSpPr>
           <p:cNvPr id="9" name="Shape 7"/>
+          <p:cNvSpPr/>
+          <p:nvPr/>
+        </p:nvSpPr>
+        <p:spPr>
+          <a:xfrm>
+            <a:off x="777240" y="5138928"/>
+            <a:ext cx="5074920" cy="932688"/>
+          </a:xfrm>
+          <a:prstGeom prst="roundRect">
+            <a:avLst>
+              <a:gd name="adj" fmla="val 6863"/>
+            </a:avLst>
+          </a:prstGeom>
+          <a:solidFill>
+            <a:srgbClr val="FFFFFF"/>
+          </a:solidFill>
+          <a:ln w="12700">
+            <a:solidFill>
+              <a:srgbClr val="DCE0F0"/>
+            </a:solidFill>
+            <a:prstDash val="solid"/>
+          </a:ln>
+        </p:spPr>
+      </p:sp>
+      <p:sp>
+        <p:nvSpPr>
+          <p:cNvPr id="10" name="Text 8"/>
+          <p:cNvSpPr/>
+          <p:nvPr/>
+        </p:nvSpPr>
+        <p:spPr>
+          <a:xfrm>
+            <a:off x="960120" y="5138928"/>
+            <a:ext cx="4709160" cy="932688"/>
+          </a:xfrm>
+          <a:prstGeom prst="rect">
+            <a:avLst/>
+          </a:prstGeom>
+          <a:noFill/>
+          <a:ln/>
+        </p:spPr>
+        <p:txBody>
+          <a:bodyPr wrap="square" lIns="0" tIns="0" rIns="0" bIns="0" rtlCol="0" anchor="ctr"/>
+          <a:lstStyle/>
+          <a:p>
+            <a:pPr indent="0" marL="0">
+              <a:buNone/>
+            </a:pPr>
+            <a:r>
+              <a:rPr lang="en-US" sz="1400" i="1" dirty="0">
+                <a:solidFill>
+                  <a:srgbClr val="312783"/>
+                </a:solidFill>
+                <a:latin typeface="Cambria" pitchFamily="34" charset="0"/>
+                <a:ea typeface="Cambria" pitchFamily="34" charset="-122"/>
+                <a:cs typeface="Cambria" pitchFamily="34" charset="-120"/>
+              </a:rPr>
+              <a:t>Всё это держалось на памяти четырёх человек и на бумажках у монитора.</a:t>
+            </a:r>
+            <a:endParaRPr lang="en-US" sz="1400" dirty="0"/>
+          </a:p>
+        </p:txBody>
+      </p:sp>
+      <p:sp>
+        <p:nvSpPr>
+          <p:cNvPr id="11" name="Shape 9"/>
           <p:cNvSpPr/>
           <p:nvPr/>
         </p:nvSpPr>
@@ -11793,7 +11859,7 @@
       </p:sp>
       <p:sp>
         <p:nvSpPr>
-          <p:cNvPr id="10" name="Text 8"/>
+          <p:cNvPr id="12" name="Text 10"/>
           <p:cNvSpPr/>
           <p:nvPr/>
         </p:nvSpPr>
@@ -11832,7 +11898,7 @@
       </p:sp>
       <p:sp>
         <p:nvSpPr>
-          <p:cNvPr id="11" name="Text 9"/>
+          <p:cNvPr id="13" name="Text 11"/>
           <p:cNvSpPr/>
           <p:nvPr/>
         </p:nvSpPr>
@@ -11874,7 +11940,7 @@
       </p:sp>
       <p:sp>
         <p:nvSpPr>
-          <p:cNvPr id="12" name="Shape 10"/>
+          <p:cNvPr id="14" name="Shape 12"/>
           <p:cNvSpPr/>
           <p:nvPr/>
         </p:nvSpPr>
@@ -11908,7 +11974,7 @@
       </p:sp>
       <p:sp>
         <p:nvSpPr>
-          <p:cNvPr id="13" name="Text 11"/>
+          <p:cNvPr id="15" name="Text 13"/>
           <p:cNvSpPr/>
           <p:nvPr/>
         </p:nvSpPr>
@@ -11947,7 +12013,7 @@
       </p:sp>
       <p:sp>
         <p:nvSpPr>
-          <p:cNvPr id="14" name="Text 12"/>
+          <p:cNvPr id="16" name="Text 14"/>
           <p:cNvSpPr/>
           <p:nvPr/>
         </p:nvSpPr>
@@ -11989,7 +12055,7 @@
       </p:sp>
       <p:sp>
         <p:nvSpPr>
-          <p:cNvPr id="15" name="Shape 13"/>
+          <p:cNvPr id="17" name="Shape 15"/>
           <p:cNvSpPr/>
           <p:nvPr/>
         </p:nvSpPr>
@@ -12023,7 +12089,7 @@
       </p:sp>
       <p:sp>
         <p:nvSpPr>
-          <p:cNvPr id="16" name="Text 14"/>
+          <p:cNvPr id="18" name="Text 16"/>
           <p:cNvSpPr/>
           <p:nvPr/>
         </p:nvSpPr>
@@ -12062,7 +12128,7 @@
       </p:sp>
       <p:sp>
         <p:nvSpPr>
-          <p:cNvPr id="17" name="Text 15"/>
+          <p:cNvPr id="19" name="Text 17"/>
           <p:cNvSpPr/>
           <p:nvPr/>
         </p:nvSpPr>
@@ -12104,7 +12170,7 @@
       </p:sp>
       <p:sp>
         <p:nvSpPr>
-          <p:cNvPr id="18" name="Shape 16"/>
+          <p:cNvPr id="20" name="Shape 18"/>
           <p:cNvSpPr/>
           <p:nvPr/>
         </p:nvSpPr>
@@ -12138,7 +12204,7 @@
       </p:sp>
       <p:sp>
         <p:nvSpPr>
-          <p:cNvPr id="19" name="Text 17"/>
+          <p:cNvPr id="21" name="Text 19"/>
           <p:cNvSpPr/>
           <p:nvPr/>
         </p:nvSpPr>
@@ -12177,7 +12243,7 @@
       </p:sp>
       <p:sp>
         <p:nvSpPr>
-          <p:cNvPr id="20" name="Text 18"/>
+          <p:cNvPr id="22" name="Text 20"/>
           <p:cNvSpPr/>
           <p:nvPr/>
         </p:nvSpPr>
@@ -12219,7 +12285,7 @@
       </p:sp>
       <p:sp>
         <p:nvSpPr>
-          <p:cNvPr id="21" name="Shape 19"/>
+          <p:cNvPr id="23" name="Shape 21"/>
           <p:cNvSpPr/>
           <p:nvPr/>
         </p:nvSpPr>
@@ -12253,7 +12319,7 @@
       </p:sp>
       <p:sp>
         <p:nvSpPr>
-          <p:cNvPr id="22" name="Text 20"/>
+          <p:cNvPr id="24" name="Text 22"/>
           <p:cNvSpPr/>
           <p:nvPr/>
         </p:nvSpPr>
@@ -12365,8 +12431,8 @@
         </p:nvSpPr>
         <p:spPr>
           <a:xfrm>
-            <a:off x="502920" y="365760"/>
-            <a:ext cx="585216" cy="585216"/>
+            <a:off x="502920" y="402336"/>
+            <a:ext cx="603504" cy="603504"/>
           </a:xfrm>
           <a:prstGeom prst="ellipse">
             <a:avLst/>
@@ -12385,8 +12451,8 @@
         </p:nvSpPr>
         <p:spPr>
           <a:xfrm>
-            <a:off x="502920" y="365760"/>
-            <a:ext cx="585216" cy="585216"/>
+            <a:off x="502920" y="402336"/>
+            <a:ext cx="603504" cy="603504"/>
           </a:xfrm>
           <a:prstGeom prst="rect">
             <a:avLst/>
@@ -12424,8 +12490,8 @@
         </p:nvSpPr>
         <p:spPr>
           <a:xfrm>
-            <a:off x="1261872" y="347472"/>
-            <a:ext cx="10332720" cy="274320"/>
+            <a:off x="1261872" y="310896"/>
+            <a:ext cx="10332720" cy="256032"/>
           </a:xfrm>
           <a:prstGeom prst="rect">
             <a:avLst/>
@@ -12463,24 +12529,24 @@
         </p:nvSpPr>
         <p:spPr>
           <a:xfrm>
-            <a:off x="1261872" y="603504"/>
-            <a:ext cx="10424160" cy="512064"/>
-          </a:xfrm>
-          <a:prstGeom prst="rect">
-            <a:avLst/>
-          </a:prstGeom>
-          <a:noFill/>
-          <a:ln/>
-        </p:spPr>
-        <p:txBody>
-          <a:bodyPr wrap="square" lIns="0" tIns="0" rIns="0" bIns="0" rtlCol="0" anchor="ctr"/>
-          <a:lstStyle/>
-          <a:p>
-            <a:pPr indent="0" marL="0">
-              <a:buNone/>
-            </a:pPr>
-            <a:r>
-              <a:rPr lang="en-US" sz="3000" b="1" dirty="0">
+            <a:off x="1261872" y="585216"/>
+            <a:ext cx="10515600" cy="566928"/>
+          </a:xfrm>
+          <a:prstGeom prst="rect">
+            <a:avLst/>
+          </a:prstGeom>
+          <a:noFill/>
+          <a:ln/>
+        </p:spPr>
+        <p:txBody>
+          <a:bodyPr wrap="square" lIns="0" tIns="0" rIns="0" bIns="0" rtlCol="0" anchor="ctr"/>
+          <a:lstStyle/>
+          <a:p>
+            <a:pPr indent="0" marL="0">
+              <a:buNone/>
+            </a:pPr>
+            <a:r>
+              <a:rPr lang="en-US" sz="2800" b="1" dirty="0">
                 <a:solidFill>
                   <a:srgbClr val="312783"/>
                 </a:solidFill>
@@ -12490,7 +12556,7 @@
               </a:rPr>
               <a:t>Не чат-бот и не робот-обзвонщик</a:t>
             </a:r>
-            <a:endParaRPr lang="en-US" sz="3000" dirty="0"/>
+            <a:endParaRPr lang="en-US" sz="2800" dirty="0"/>
           </a:p>
         </p:txBody>
       </p:sp>
@@ -13021,8 +13087,8 @@
         </p:nvSpPr>
         <p:spPr>
           <a:xfrm>
-            <a:off x="502920" y="365760"/>
-            <a:ext cx="585216" cy="585216"/>
+            <a:off x="502920" y="402336"/>
+            <a:ext cx="603504" cy="603504"/>
           </a:xfrm>
           <a:prstGeom prst="ellipse">
             <a:avLst/>
@@ -13041,8 +13107,8 @@
         </p:nvSpPr>
         <p:spPr>
           <a:xfrm>
-            <a:off x="502920" y="365760"/>
-            <a:ext cx="585216" cy="585216"/>
+            <a:off x="502920" y="402336"/>
+            <a:ext cx="603504" cy="603504"/>
           </a:xfrm>
           <a:prstGeom prst="rect">
             <a:avLst/>
@@ -13080,8 +13146,8 @@
         </p:nvSpPr>
         <p:spPr>
           <a:xfrm>
-            <a:off x="1261872" y="347472"/>
-            <a:ext cx="10332720" cy="274320"/>
+            <a:off x="1261872" y="310896"/>
+            <a:ext cx="10332720" cy="256032"/>
           </a:xfrm>
           <a:prstGeom prst="rect">
             <a:avLst/>
@@ -13119,24 +13185,24 @@
         </p:nvSpPr>
         <p:spPr>
           <a:xfrm>
-            <a:off x="1261872" y="603504"/>
-            <a:ext cx="10424160" cy="512064"/>
-          </a:xfrm>
-          <a:prstGeom prst="rect">
-            <a:avLst/>
-          </a:prstGeom>
-          <a:noFill/>
-          <a:ln/>
-        </p:spPr>
-        <p:txBody>
-          <a:bodyPr wrap="square" lIns="0" tIns="0" rIns="0" bIns="0" rtlCol="0" anchor="ctr"/>
-          <a:lstStyle/>
-          <a:p>
-            <a:pPr indent="0" marL="0">
-              <a:buNone/>
-            </a:pPr>
-            <a:r>
-              <a:rPr lang="en-US" sz="3000" b="1" dirty="0">
+            <a:off x="1261872" y="585216"/>
+            <a:ext cx="10515600" cy="566928"/>
+          </a:xfrm>
+          <a:prstGeom prst="rect">
+            <a:avLst/>
+          </a:prstGeom>
+          <a:noFill/>
+          <a:ln/>
+        </p:spPr>
+        <p:txBody>
+          <a:bodyPr wrap="square" lIns="0" tIns="0" rIns="0" bIns="0" rtlCol="0" anchor="ctr"/>
+          <a:lstStyle/>
+          <a:p>
+            <a:pPr indent="0" marL="0">
+              <a:buNone/>
+            </a:pPr>
+            <a:r>
+              <a:rPr lang="en-US" sz="2800" b="1" dirty="0">
                 <a:solidFill>
                   <a:srgbClr val="312783"/>
                 </a:solidFill>
@@ -13146,7 +13212,7 @@
               </a:rPr>
               <a:t>Пять систем в одних руках</a:t>
             </a:r>
-            <a:endParaRPr lang="en-US" sz="3000" dirty="0"/>
+            <a:endParaRPr lang="en-US" sz="2800" dirty="0"/>
           </a:p>
         </p:txBody>
       </p:sp>
@@ -13158,7 +13224,7 @@
         </p:nvSpPr>
         <p:spPr>
           <a:xfrm>
-            <a:off x="3703320" y="1792224"/>
+            <a:off x="3703320" y="1920240"/>
             <a:ext cx="457200" cy="0"/>
           </a:xfrm>
           <a:prstGeom prst="line">
@@ -13181,7 +13247,7 @@
         </p:nvSpPr>
         <p:spPr>
           <a:xfrm>
-            <a:off x="3703320" y="3392424"/>
+            <a:off x="3703320" y="3465576"/>
             <a:ext cx="457200" cy="0"/>
           </a:xfrm>
           <a:prstGeom prst="line">
@@ -13204,7 +13270,7 @@
         </p:nvSpPr>
         <p:spPr>
           <a:xfrm>
-            <a:off x="3703320" y="4992624"/>
+            <a:off x="3703320" y="5010912"/>
             <a:ext cx="457200" cy="0"/>
           </a:xfrm>
           <a:prstGeom prst="line">
@@ -13227,8 +13293,8 @@
         </p:nvSpPr>
         <p:spPr>
           <a:xfrm>
-            <a:off x="4160520" y="1792224"/>
-            <a:ext cx="0" cy="3200400"/>
+            <a:off x="4160520" y="1920240"/>
+            <a:ext cx="0" cy="3090672"/>
           </a:xfrm>
           <a:prstGeom prst="line">
             <a:avLst/>
@@ -13250,7 +13316,7 @@
         </p:nvSpPr>
         <p:spPr>
           <a:xfrm>
-            <a:off x="4160520" y="3392424"/>
+            <a:off x="4160520" y="3465576"/>
             <a:ext cx="411480" cy="0"/>
           </a:xfrm>
           <a:prstGeom prst="line">
@@ -13273,7 +13339,7 @@
         </p:nvSpPr>
         <p:spPr>
           <a:xfrm>
-            <a:off x="8028432" y="2569464"/>
+            <a:off x="8028432" y="2651760"/>
             <a:ext cx="457200" cy="0"/>
           </a:xfrm>
           <a:prstGeom prst="line">
@@ -13296,7 +13362,7 @@
         </p:nvSpPr>
         <p:spPr>
           <a:xfrm>
-            <a:off x="8028432" y="4809744"/>
+            <a:off x="8028432" y="4901184"/>
             <a:ext cx="457200" cy="0"/>
           </a:xfrm>
           <a:prstGeom prst="line">
@@ -13319,8 +13385,8 @@
         </p:nvSpPr>
         <p:spPr>
           <a:xfrm>
-            <a:off x="8028432" y="2569464"/>
-            <a:ext cx="0" cy="2240280"/>
+            <a:off x="8028432" y="2651760"/>
+            <a:ext cx="0" cy="2249424"/>
           </a:xfrm>
           <a:prstGeom prst="line">
             <a:avLst/>
@@ -13342,7 +13408,7 @@
         </p:nvSpPr>
         <p:spPr>
           <a:xfrm>
-            <a:off x="7616952" y="3392424"/>
+            <a:off x="7616952" y="3465576"/>
             <a:ext cx="411480" cy="0"/>
           </a:xfrm>
           <a:prstGeom prst="line">
@@ -13365,7 +13431,7 @@
         </p:nvSpPr>
         <p:spPr>
           <a:xfrm>
-            <a:off x="502920" y="1170432"/>
+            <a:off x="502920" y="1298448"/>
             <a:ext cx="3200400" cy="1243584"/>
           </a:xfrm>
           <a:prstGeom prst="roundRect">
@@ -13399,7 +13465,7 @@
         </p:nvSpPr>
         <p:spPr>
           <a:xfrm>
-            <a:off x="667512" y="1261872"/>
+            <a:off x="667512" y="1389888"/>
             <a:ext cx="2871216" cy="256032"/>
           </a:xfrm>
           <a:prstGeom prst="rect">
@@ -13438,7 +13504,7 @@
         </p:nvSpPr>
         <p:spPr>
           <a:xfrm>
-            <a:off x="667512" y="1554480"/>
+            <a:off x="667512" y="1682496"/>
             <a:ext cx="2871216" cy="384048"/>
           </a:xfrm>
           <a:prstGeom prst="rect">
@@ -13497,7 +13563,7 @@
         </p:nvSpPr>
         <p:spPr>
           <a:xfrm>
-            <a:off x="667512" y="1956816"/>
+            <a:off x="667512" y="2084832"/>
             <a:ext cx="2871216" cy="384048"/>
           </a:xfrm>
           <a:prstGeom prst="rect">
@@ -13556,7 +13622,7 @@
         </p:nvSpPr>
         <p:spPr>
           <a:xfrm>
-            <a:off x="502920" y="2770632"/>
+            <a:off x="502920" y="2843784"/>
             <a:ext cx="3200400" cy="1243584"/>
           </a:xfrm>
           <a:prstGeom prst="roundRect">
@@ -13590,7 +13656,7 @@
         </p:nvSpPr>
         <p:spPr>
           <a:xfrm>
-            <a:off x="667512" y="2862072"/>
+            <a:off x="667512" y="2935224"/>
             <a:ext cx="2871216" cy="256032"/>
           </a:xfrm>
           <a:prstGeom prst="rect">
@@ -13629,7 +13695,7 @@
         </p:nvSpPr>
         <p:spPr>
           <a:xfrm>
-            <a:off x="667512" y="3154680"/>
+            <a:off x="667512" y="3227832"/>
             <a:ext cx="2871216" cy="384048"/>
           </a:xfrm>
           <a:prstGeom prst="rect">
@@ -13688,7 +13754,7 @@
         </p:nvSpPr>
         <p:spPr>
           <a:xfrm>
-            <a:off x="667512" y="3557016"/>
+            <a:off x="667512" y="3630168"/>
             <a:ext cx="2871216" cy="384048"/>
           </a:xfrm>
           <a:prstGeom prst="rect">
@@ -13747,7 +13813,7 @@
         </p:nvSpPr>
         <p:spPr>
           <a:xfrm>
-            <a:off x="502920" y="4370832"/>
+            <a:off x="502920" y="4389120"/>
             <a:ext cx="3200400" cy="1243584"/>
           </a:xfrm>
           <a:prstGeom prst="roundRect">
@@ -13781,7 +13847,7 @@
         </p:nvSpPr>
         <p:spPr>
           <a:xfrm>
-            <a:off x="667512" y="4462272"/>
+            <a:off x="667512" y="4480560"/>
             <a:ext cx="2871216" cy="256032"/>
           </a:xfrm>
           <a:prstGeom prst="rect">
@@ -13806,7 +13872,7 @@
                 <a:ea typeface="Calibri" pitchFamily="34" charset="-122"/>
                 <a:cs typeface="Calibri" pitchFamily="34" charset="-120"/>
               </a:rPr>
-              <a:t>Wazzup — WhatsApp и Telegram</a:t>
+              <a:t>Wazzup — мессенджеры</a:t>
             </a:r>
             <a:endParaRPr lang="en-US" sz="1250" dirty="0"/>
           </a:p>
@@ -13820,7 +13886,7 @@
         </p:nvSpPr>
         <p:spPr>
           <a:xfrm>
-            <a:off x="667512" y="4754880"/>
+            <a:off x="667512" y="4773168"/>
             <a:ext cx="2871216" cy="384048"/>
           </a:xfrm>
           <a:prstGeom prst="rect">
@@ -13879,7 +13945,7 @@
         </p:nvSpPr>
         <p:spPr>
           <a:xfrm>
-            <a:off x="667512" y="5157216"/>
+            <a:off x="667512" y="5175504"/>
             <a:ext cx="2871216" cy="384048"/>
           </a:xfrm>
           <a:prstGeom prst="rect">
@@ -13938,7 +14004,7 @@
         </p:nvSpPr>
         <p:spPr>
           <a:xfrm>
-            <a:off x="8485632" y="1947672"/>
+            <a:off x="8485632" y="2029968"/>
             <a:ext cx="3200400" cy="1243584"/>
           </a:xfrm>
           <a:prstGeom prst="roundRect">
@@ -13972,7 +14038,7 @@
         </p:nvSpPr>
         <p:spPr>
           <a:xfrm>
-            <a:off x="8650224" y="2039112"/>
+            <a:off x="8650224" y="2121408"/>
             <a:ext cx="2871216" cy="256032"/>
           </a:xfrm>
           <a:prstGeom prst="rect">
@@ -14011,7 +14077,7 @@
         </p:nvSpPr>
         <p:spPr>
           <a:xfrm>
-            <a:off x="8650224" y="2331720"/>
+            <a:off x="8650224" y="2414016"/>
             <a:ext cx="2871216" cy="384048"/>
           </a:xfrm>
           <a:prstGeom prst="rect">
@@ -14070,7 +14136,7 @@
         </p:nvSpPr>
         <p:spPr>
           <a:xfrm>
-            <a:off x="8650224" y="2734056"/>
+            <a:off x="8650224" y="2816352"/>
             <a:ext cx="2871216" cy="384048"/>
           </a:xfrm>
           <a:prstGeom prst="rect">
@@ -14129,7 +14195,7 @@
         </p:nvSpPr>
         <p:spPr>
           <a:xfrm>
-            <a:off x="8485632" y="4187952"/>
+            <a:off x="8485632" y="4279392"/>
             <a:ext cx="3200400" cy="1243584"/>
           </a:xfrm>
           <a:prstGeom prst="roundRect">
@@ -14163,7 +14229,7 @@
         </p:nvSpPr>
         <p:spPr>
           <a:xfrm>
-            <a:off x="8650224" y="4279392"/>
+            <a:off x="8650224" y="4370832"/>
             <a:ext cx="2871216" cy="256032"/>
           </a:xfrm>
           <a:prstGeom prst="rect">
@@ -14202,7 +14268,7 @@
         </p:nvSpPr>
         <p:spPr>
           <a:xfrm>
-            <a:off x="8650224" y="4572000"/>
+            <a:off x="8650224" y="4663440"/>
             <a:ext cx="2871216" cy="384048"/>
           </a:xfrm>
           <a:prstGeom prst="rect">
@@ -14261,7 +14327,7 @@
         </p:nvSpPr>
         <p:spPr>
           <a:xfrm>
-            <a:off x="8650224" y="4974336"/>
+            <a:off x="8650224" y="5065776"/>
             <a:ext cx="2871216" cy="384048"/>
           </a:xfrm>
           <a:prstGeom prst="rect">
@@ -14320,7 +14386,7 @@
         </p:nvSpPr>
         <p:spPr>
           <a:xfrm>
-            <a:off x="4572000" y="2770632"/>
+            <a:off x="4572000" y="2843784"/>
             <a:ext cx="3044952" cy="1243584"/>
           </a:xfrm>
           <a:prstGeom prst="roundRect">
@@ -14349,7 +14415,7 @@
         </p:nvSpPr>
         <p:spPr>
           <a:xfrm>
-            <a:off x="4572000" y="2770632"/>
+            <a:off x="4572000" y="2843784"/>
             <a:ext cx="3044952" cy="1243584"/>
           </a:xfrm>
           <a:prstGeom prst="rect">
@@ -14403,7 +14469,7 @@
         </p:nvSpPr>
         <p:spPr>
           <a:xfrm>
-            <a:off x="502920" y="5870448"/>
+            <a:off x="502920" y="5925312"/>
             <a:ext cx="11183112" cy="411480"/>
           </a:xfrm>
           <a:prstGeom prst="rect">
@@ -14467,8 +14533,8 @@
         </p:nvSpPr>
         <p:spPr>
           <a:xfrm>
-            <a:off x="502920" y="365760"/>
-            <a:ext cx="585216" cy="585216"/>
+            <a:off x="502920" y="402336"/>
+            <a:ext cx="603504" cy="603504"/>
           </a:xfrm>
           <a:prstGeom prst="ellipse">
             <a:avLst/>
@@ -14487,8 +14553,8 @@
         </p:nvSpPr>
         <p:spPr>
           <a:xfrm>
-            <a:off x="502920" y="365760"/>
-            <a:ext cx="585216" cy="585216"/>
+            <a:off x="502920" y="402336"/>
+            <a:ext cx="603504" cy="603504"/>
           </a:xfrm>
           <a:prstGeom prst="rect">
             <a:avLst/>
@@ -14526,8 +14592,8 @@
         </p:nvSpPr>
         <p:spPr>
           <a:xfrm>
-            <a:off x="1261872" y="347472"/>
-            <a:ext cx="10332720" cy="274320"/>
+            <a:off x="1261872" y="310896"/>
+            <a:ext cx="10332720" cy="256032"/>
           </a:xfrm>
           <a:prstGeom prst="rect">
             <a:avLst/>
@@ -14565,24 +14631,24 @@
         </p:nvSpPr>
         <p:spPr>
           <a:xfrm>
-            <a:off x="1261872" y="603504"/>
-            <a:ext cx="10424160" cy="512064"/>
-          </a:xfrm>
-          <a:prstGeom prst="rect">
-            <a:avLst/>
-          </a:prstGeom>
-          <a:noFill/>
-          <a:ln/>
-        </p:spPr>
-        <p:txBody>
-          <a:bodyPr wrap="square" lIns="0" tIns="0" rIns="0" bIns="0" rtlCol="0" anchor="ctr"/>
-          <a:lstStyle/>
-          <a:p>
-            <a:pPr indent="0" marL="0">
-              <a:buNone/>
-            </a:pPr>
-            <a:r>
-              <a:rPr lang="en-US" sz="3000" b="1" dirty="0">
+            <a:off x="1261872" y="585216"/>
+            <a:ext cx="10515600" cy="566928"/>
+          </a:xfrm>
+          <a:prstGeom prst="rect">
+            <a:avLst/>
+          </a:prstGeom>
+          <a:noFill/>
+          <a:ln/>
+        </p:spPr>
+        <p:txBody>
+          <a:bodyPr wrap="square" lIns="0" tIns="0" rIns="0" bIns="0" rtlCol="0" anchor="ctr"/>
+          <a:lstStyle/>
+          <a:p>
+            <a:pPr indent="0" marL="0">
+              <a:buNone/>
+            </a:pPr>
+            <a:r>
+              <a:rPr lang="en-US" sz="2800" b="1" dirty="0">
                 <a:solidFill>
                   <a:srgbClr val="312783"/>
                 </a:solidFill>
@@ -14590,9 +14656,9 @@
                 <a:ea typeface="Calibri" pitchFamily="34" charset="-122"/>
                 <a:cs typeface="Calibri" pitchFamily="34" charset="-120"/>
               </a:rPr>
-              <a:t>Что происходит без единой команды человека</a:t>
-            </a:r>
-            <a:endParaRPr lang="en-US" sz="3000" dirty="0"/>
+              <a:t>Что происходит без команды человека</a:t>
+            </a:r>
+            <a:endParaRPr lang="en-US" sz="2800" dirty="0"/>
           </a:p>
         </p:txBody>
       </p:sp>
@@ -15663,12 +15729,12 @@
         </p:nvSpPr>
         <p:spPr>
           <a:xfrm>
-            <a:off x="557784" y="4663440"/>
-            <a:ext cx="11064240" cy="1463040"/>
+            <a:off x="557784" y="4498848"/>
+            <a:ext cx="11064240" cy="1481328"/>
           </a:xfrm>
           <a:prstGeom prst="roundRect">
             <a:avLst>
-              <a:gd name="adj" fmla="val 6250"/>
+              <a:gd name="adj" fmla="val 6173"/>
             </a:avLst>
           </a:prstGeom>
           <a:solidFill>
@@ -15697,7 +15763,7 @@
         </p:nvSpPr>
         <p:spPr>
           <a:xfrm>
-            <a:off x="868680" y="4828032"/>
+            <a:off x="868680" y="4681728"/>
             <a:ext cx="10424160" cy="310896"/>
           </a:xfrm>
           <a:prstGeom prst="rect">
@@ -15736,7 +15802,7 @@
         </p:nvSpPr>
         <p:spPr>
           <a:xfrm>
-            <a:off x="868680" y="5212080"/>
+            <a:off x="868680" y="5084064"/>
             <a:ext cx="2542032" cy="822960"/>
           </a:xfrm>
           <a:prstGeom prst="rect">
@@ -15796,7 +15862,7 @@
         </p:nvSpPr>
         <p:spPr>
           <a:xfrm>
-            <a:off x="3538728" y="5212080"/>
+            <a:off x="3538728" y="5084064"/>
             <a:ext cx="2542032" cy="822960"/>
           </a:xfrm>
           <a:prstGeom prst="rect">
@@ -15856,7 +15922,7 @@
         </p:nvSpPr>
         <p:spPr>
           <a:xfrm>
-            <a:off x="6208776" y="5212080"/>
+            <a:off x="6208776" y="5084064"/>
             <a:ext cx="2542032" cy="822960"/>
           </a:xfrm>
           <a:prstGeom prst="rect">
@@ -15916,7 +15982,7 @@
         </p:nvSpPr>
         <p:spPr>
           <a:xfrm>
-            <a:off x="8878824" y="5212080"/>
+            <a:off x="8878824" y="5084064"/>
             <a:ext cx="2542032" cy="822960"/>
           </a:xfrm>
           <a:prstGeom prst="rect">
@@ -16001,8 +16067,8 @@
         </p:nvSpPr>
         <p:spPr>
           <a:xfrm>
-            <a:off x="502920" y="365760"/>
-            <a:ext cx="585216" cy="585216"/>
+            <a:off x="502920" y="402336"/>
+            <a:ext cx="603504" cy="603504"/>
           </a:xfrm>
           <a:prstGeom prst="ellipse">
             <a:avLst/>
@@ -16021,8 +16087,8 @@
         </p:nvSpPr>
         <p:spPr>
           <a:xfrm>
-            <a:off x="502920" y="365760"/>
-            <a:ext cx="585216" cy="585216"/>
+            <a:off x="502920" y="402336"/>
+            <a:ext cx="603504" cy="603504"/>
           </a:xfrm>
           <a:prstGeom prst="rect">
             <a:avLst/>
@@ -16060,8 +16126,8 @@
         </p:nvSpPr>
         <p:spPr>
           <a:xfrm>
-            <a:off x="1261872" y="347472"/>
-            <a:ext cx="10332720" cy="274320"/>
+            <a:off x="1261872" y="310896"/>
+            <a:ext cx="10332720" cy="256032"/>
           </a:xfrm>
           <a:prstGeom prst="rect">
             <a:avLst/>
@@ -16099,24 +16165,24 @@
         </p:nvSpPr>
         <p:spPr>
           <a:xfrm>
-            <a:off x="1261872" y="603504"/>
-            <a:ext cx="10424160" cy="512064"/>
-          </a:xfrm>
-          <a:prstGeom prst="rect">
-            <a:avLst/>
-          </a:prstGeom>
-          <a:noFill/>
-          <a:ln/>
-        </p:spPr>
-        <p:txBody>
-          <a:bodyPr wrap="square" lIns="0" tIns="0" rIns="0" bIns="0" rtlCol="0" anchor="ctr"/>
-          <a:lstStyle/>
-          <a:p>
-            <a:pPr indent="0" marL="0">
-              <a:buNone/>
-            </a:pPr>
-            <a:r>
-              <a:rPr lang="en-US" sz="3000" b="1" dirty="0">
+            <a:off x="1261872" y="585216"/>
+            <a:ext cx="10515600" cy="566928"/>
+          </a:xfrm>
+          <a:prstGeom prst="rect">
+            <a:avLst/>
+          </a:prstGeom>
+          <a:noFill/>
+          <a:ln/>
+        </p:spPr>
+        <p:txBody>
+          <a:bodyPr wrap="square" lIns="0" tIns="0" rIns="0" bIns="0" rtlCol="0" anchor="ctr"/>
+          <a:lstStyle/>
+          <a:p>
+            <a:pPr indent="0" marL="0">
+              <a:buNone/>
+            </a:pPr>
+            <a:r>
+              <a:rPr lang="en-US" sz="2800" b="1" dirty="0">
                 <a:solidFill>
                   <a:srgbClr val="312783"/>
                 </a:solidFill>
@@ -16126,7 +16192,7 @@
               </a:rPr>
               <a:t>Слушает звонки и превращает их в задачи</a:t>
             </a:r>
-            <a:endParaRPr lang="en-US" sz="3000" dirty="0"/>
+            <a:endParaRPr lang="en-US" sz="2800" dirty="0"/>
           </a:p>
         </p:txBody>
       </p:sp>
@@ -17394,8 +17460,8 @@
         </p:nvSpPr>
         <p:spPr>
           <a:xfrm>
-            <a:off x="502920" y="365760"/>
-            <a:ext cx="585216" cy="585216"/>
+            <a:off x="502920" y="402336"/>
+            <a:ext cx="603504" cy="603504"/>
           </a:xfrm>
           <a:prstGeom prst="ellipse">
             <a:avLst/>
@@ -17414,8 +17480,8 @@
         </p:nvSpPr>
         <p:spPr>
           <a:xfrm>
-            <a:off x="502920" y="365760"/>
-            <a:ext cx="585216" cy="585216"/>
+            <a:off x="502920" y="402336"/>
+            <a:ext cx="603504" cy="603504"/>
           </a:xfrm>
           <a:prstGeom prst="rect">
             <a:avLst/>
@@ -17453,8 +17519,8 @@
         </p:nvSpPr>
         <p:spPr>
           <a:xfrm>
-            <a:off x="1261872" y="347472"/>
-            <a:ext cx="10332720" cy="274320"/>
+            <a:off x="1261872" y="310896"/>
+            <a:ext cx="10332720" cy="256032"/>
           </a:xfrm>
           <a:prstGeom prst="rect">
             <a:avLst/>
@@ -17492,24 +17558,24 @@
         </p:nvSpPr>
         <p:spPr>
           <a:xfrm>
-            <a:off x="1261872" y="603504"/>
-            <a:ext cx="10424160" cy="512064"/>
-          </a:xfrm>
-          <a:prstGeom prst="rect">
-            <a:avLst/>
-          </a:prstGeom>
-          <a:noFill/>
-          <a:ln/>
-        </p:spPr>
-        <p:txBody>
-          <a:bodyPr wrap="square" lIns="0" tIns="0" rIns="0" bIns="0" rtlCol="0" anchor="ctr"/>
-          <a:lstStyle/>
-          <a:p>
-            <a:pPr indent="0" marL="0">
-              <a:buNone/>
-            </a:pPr>
-            <a:r>
-              <a:rPr lang="en-US" sz="3000" b="1" dirty="0">
+            <a:off x="1261872" y="585216"/>
+            <a:ext cx="10515600" cy="566928"/>
+          </a:xfrm>
+          <a:prstGeom prst="rect">
+            <a:avLst/>
+          </a:prstGeom>
+          <a:noFill/>
+          <a:ln/>
+        </p:spPr>
+        <p:txBody>
+          <a:bodyPr wrap="square" lIns="0" tIns="0" rIns="0" bIns="0" rtlCol="0" anchor="ctr"/>
+          <a:lstStyle/>
+          <a:p>
+            <a:pPr indent="0" marL="0">
+              <a:buNone/>
+            </a:pPr>
+            <a:r>
+              <a:rPr lang="en-US" sz="2800" b="1" dirty="0">
                 <a:solidFill>
                   <a:srgbClr val="312783"/>
                 </a:solidFill>
@@ -17519,7 +17585,7 @@
               </a:rPr>
               <a:t>Одна и та же задача: было и стало</a:t>
             </a:r>
-            <a:endParaRPr lang="en-US" sz="3000" dirty="0"/>
+            <a:endParaRPr lang="en-US" sz="2800" dirty="0"/>
           </a:p>
         </p:txBody>
       </p:sp>
@@ -18390,8 +18456,8 @@
         </p:nvSpPr>
         <p:spPr>
           <a:xfrm>
-            <a:off x="502920" y="365760"/>
-            <a:ext cx="585216" cy="585216"/>
+            <a:off x="502920" y="402336"/>
+            <a:ext cx="603504" cy="603504"/>
           </a:xfrm>
           <a:prstGeom prst="ellipse">
             <a:avLst/>
@@ -18410,8 +18476,8 @@
         </p:nvSpPr>
         <p:spPr>
           <a:xfrm>
-            <a:off x="502920" y="365760"/>
-            <a:ext cx="585216" cy="585216"/>
+            <a:off x="502920" y="402336"/>
+            <a:ext cx="603504" cy="603504"/>
           </a:xfrm>
           <a:prstGeom prst="rect">
             <a:avLst/>
@@ -18449,8 +18515,8 @@
         </p:nvSpPr>
         <p:spPr>
           <a:xfrm>
-            <a:off x="1261872" y="347472"/>
-            <a:ext cx="10332720" cy="274320"/>
+            <a:off x="1261872" y="310896"/>
+            <a:ext cx="10332720" cy="256032"/>
           </a:xfrm>
           <a:prstGeom prst="rect">
             <a:avLst/>
@@ -18488,24 +18554,24 @@
         </p:nvSpPr>
         <p:spPr>
           <a:xfrm>
-            <a:off x="1261872" y="603504"/>
-            <a:ext cx="10424160" cy="512064"/>
-          </a:xfrm>
-          <a:prstGeom prst="rect">
-            <a:avLst/>
-          </a:prstGeom>
-          <a:noFill/>
-          <a:ln/>
-        </p:spPr>
-        <p:txBody>
-          <a:bodyPr wrap="square" lIns="0" tIns="0" rIns="0" bIns="0" rtlCol="0" anchor="ctr"/>
-          <a:lstStyle/>
-          <a:p>
-            <a:pPr indent="0" marL="0">
-              <a:buNone/>
-            </a:pPr>
-            <a:r>
-              <a:rPr lang="en-US" sz="3000" b="1" dirty="0">
+            <a:off x="1261872" y="585216"/>
+            <a:ext cx="10515600" cy="566928"/>
+          </a:xfrm>
+          <a:prstGeom prst="rect">
+            <a:avLst/>
+          </a:prstGeom>
+          <a:noFill/>
+          <a:ln/>
+        </p:spPr>
+        <p:txBody>
+          <a:bodyPr wrap="square" lIns="0" tIns="0" rIns="0" bIns="0" rtlCol="0" anchor="ctr"/>
+          <a:lstStyle/>
+          <a:p>
+            <a:pPr indent="0" marL="0">
+              <a:buNone/>
+            </a:pPr>
+            <a:r>
+              <a:rPr lang="en-US" sz="2800" b="1" dirty="0">
                 <a:solidFill>
                   <a:srgbClr val="312783"/>
                 </a:solidFill>
@@ -18515,1641 +18581,1094 @@
               </a:rPr>
               <a:t>750 задач разобраны по одной</a:t>
             </a:r>
-            <a:endParaRPr lang="en-US" sz="3000" dirty="0"/>
-          </a:p>
-        </p:txBody>
-      </p:sp>
-      <p:graphicFrame>
-        <p:nvGraphicFramePr>
-          <p:cNvPr id="9" name="Table 0"/>
-          <p:cNvGraphicFramePr>
-            <a:graphicFrameLocks noGrp="1"/>
-          </p:cNvGraphicFramePr>
-          <p:nvPr>
-            <p:extLst>
-              <p:ext uri="{D42A27DB-BD31-4B8C-83A1-F6EECF244321}">
-                <p14:modId xmlns:p14="http://schemas.microsoft.com/office/powerpoint/2010/main" val="1579011935"/>
-              </p:ext>
-            </p:extLst>
-          </p:nvPr>
-        </p:nvGraphicFramePr>
-        <p:xfrm>
-          <a:off x="502920" y="1481328"/>
-          <a:ext cx="6035040" cy="914400"/>
-        </p:xfrm>
-        <a:graphic>
-          <a:graphicData uri="http://schemas.openxmlformats.org/drawingml/2006/table">
-            <a:tbl>
-              <a:tblPr/>
-              <a:tblGrid>
-                <a:gridCol w="2194560"/>
-                <a:gridCol w="1188720"/>
-                <a:gridCol w="1188720"/>
-                <a:gridCol w="1463040"/>
-              </a:tblGrid>
-              <a:tr h="384048">
-                <a:tc>
-                  <a:txBody>
-                    <a:bodyPr/>
-                    <a:lstStyle/>
-                    <a:p>
-                      <a:pPr algn="l" indent="0" marL="0">
-                        <a:buNone/>
-                      </a:pPr>
-                      <a:r>
-                        <a:rPr lang="en-US" sz="1300" b="1" dirty="0">
-                          <a:solidFill>
-                            <a:srgbClr val="FFFFFF"/>
-                          </a:solidFill>
-                          <a:latin typeface="Calibri" pitchFamily="34" charset="0"/>
-                          <a:ea typeface="Calibri" pitchFamily="34" charset="-122"/>
-                          <a:cs typeface="Calibri" pitchFamily="34" charset="-120"/>
-                        </a:rPr>
-                        <a:t>Администратор</a:t>
-                      </a:r>
-                      <a:endParaRPr lang="en-US" sz="1300" dirty="0">
-                        <a:latin typeface="Calibri" charset="0"/>
-                        <a:ea typeface="Calibri" charset="0"/>
-                        <a:cs typeface="Calibri" charset="0"/>
-                      </a:endParaRPr>
-                    </a:p>
-                  </a:txBody>
-                  <a:tcPr marL="7315200" marR="7315200" marT="0" marB="0" anchor="ctr">
-                    <a:lnL w="12700" cap="flat" cmpd="sng" algn="ctr">
-                      <a:solidFill>
-                        <a:srgbClr val="DCE0F0"/>
-                      </a:solidFill>
-                      <a:prstDash val="solid"/>
-                      <a:round/>
-                      <a:headEnd type="none" w="med" len="med"/>
-                      <a:tailEnd type="none" w="med" len="med"/>
-                    </a:lnL>
-                    <a:lnR w="12700" cap="flat" cmpd="sng" algn="ctr">
-                      <a:solidFill>
-                        <a:srgbClr val="DCE0F0"/>
-                      </a:solidFill>
-                      <a:prstDash val="solid"/>
-                      <a:round/>
-                      <a:headEnd type="none" w="med" len="med"/>
-                      <a:tailEnd type="none" w="med" len="med"/>
-                    </a:lnR>
-                    <a:lnT w="12700" cap="flat" cmpd="sng" algn="ctr">
-                      <a:solidFill>
-                        <a:srgbClr val="DCE0F0"/>
-                      </a:solidFill>
-                      <a:prstDash val="solid"/>
-                      <a:round/>
-                      <a:headEnd type="none" w="med" len="med"/>
-                      <a:tailEnd type="none" w="med" len="med"/>
-                    </a:lnT>
-                    <a:lnB w="12700" cap="flat" cmpd="sng" algn="ctr">
-                      <a:solidFill>
-                        <a:srgbClr val="DCE0F0"/>
-                      </a:solidFill>
-                      <a:prstDash val="solid"/>
-                      <a:round/>
-                      <a:headEnd type="none" w="med" len="med"/>
-                      <a:tailEnd type="none" w="med" len="med"/>
-                    </a:lnB>
-                    <a:solidFill>
-                      <a:srgbClr val="312783"/>
-                    </a:solidFill>
-                  </a:tcPr>
-                </a:tc>
-                <a:tc>
-                  <a:txBody>
-                    <a:bodyPr/>
-                    <a:lstStyle/>
-                    <a:p>
-                      <a:pPr algn="ctr" indent="0" marL="0">
-                        <a:buNone/>
-                      </a:pPr>
-                      <a:r>
-                        <a:rPr lang="en-US" sz="1300" b="1" dirty="0">
-                          <a:solidFill>
-                            <a:srgbClr val="FFFFFF"/>
-                          </a:solidFill>
-                          <a:latin typeface="Calibri" pitchFamily="34" charset="0"/>
-                          <a:ea typeface="Calibri" pitchFamily="34" charset="-122"/>
-                          <a:cs typeface="Calibri" pitchFamily="34" charset="-120"/>
-                        </a:rPr>
-                        <a:t>Было</a:t>
-                      </a:r>
-                      <a:endParaRPr lang="en-US" sz="1300" dirty="0">
-                        <a:latin typeface="Calibri" charset="0"/>
-                        <a:ea typeface="Calibri" charset="0"/>
-                        <a:cs typeface="Calibri" charset="0"/>
-                      </a:endParaRPr>
-                    </a:p>
-                  </a:txBody>
-                  <a:tcPr marL="7315200" marR="7315200" marT="0" marB="0" anchor="ctr">
-                    <a:lnL w="12700" cap="flat" cmpd="sng" algn="ctr">
-                      <a:solidFill>
-                        <a:srgbClr val="DCE0F0"/>
-                      </a:solidFill>
-                      <a:prstDash val="solid"/>
-                      <a:round/>
-                      <a:headEnd type="none" w="med" len="med"/>
-                      <a:tailEnd type="none" w="med" len="med"/>
-                    </a:lnL>
-                    <a:lnR w="12700" cap="flat" cmpd="sng" algn="ctr">
-                      <a:solidFill>
-                        <a:srgbClr val="DCE0F0"/>
-                      </a:solidFill>
-                      <a:prstDash val="solid"/>
-                      <a:round/>
-                      <a:headEnd type="none" w="med" len="med"/>
-                      <a:tailEnd type="none" w="med" len="med"/>
-                    </a:lnR>
-                    <a:lnT w="12700" cap="flat" cmpd="sng" algn="ctr">
-                      <a:solidFill>
-                        <a:srgbClr val="DCE0F0"/>
-                      </a:solidFill>
-                      <a:prstDash val="solid"/>
-                      <a:round/>
-                      <a:headEnd type="none" w="med" len="med"/>
-                      <a:tailEnd type="none" w="med" len="med"/>
-                    </a:lnT>
-                    <a:lnB w="12700" cap="flat" cmpd="sng" algn="ctr">
-                      <a:solidFill>
-                        <a:srgbClr val="DCE0F0"/>
-                      </a:solidFill>
-                      <a:prstDash val="solid"/>
-                      <a:round/>
-                      <a:headEnd type="none" w="med" len="med"/>
-                      <a:tailEnd type="none" w="med" len="med"/>
-                    </a:lnB>
-                    <a:solidFill>
-                      <a:srgbClr val="312783"/>
-                    </a:solidFill>
-                  </a:tcPr>
-                </a:tc>
-                <a:tc>
-                  <a:txBody>
-                    <a:bodyPr/>
-                    <a:lstStyle/>
-                    <a:p>
-                      <a:pPr algn="ctr" indent="0" marL="0">
-                        <a:buNone/>
-                      </a:pPr>
-                      <a:r>
-                        <a:rPr lang="en-US" sz="1300" b="1" dirty="0">
-                          <a:solidFill>
-                            <a:srgbClr val="FFFFFF"/>
-                          </a:solidFill>
-                          <a:latin typeface="Calibri" pitchFamily="34" charset="0"/>
-                          <a:ea typeface="Calibri" pitchFamily="34" charset="-122"/>
-                          <a:cs typeface="Calibri" pitchFamily="34" charset="-120"/>
-                        </a:rPr>
-                        <a:t>Стало</a:t>
-                      </a:r>
-                      <a:endParaRPr lang="en-US" sz="1300" dirty="0">
-                        <a:latin typeface="Calibri" charset="0"/>
-                        <a:ea typeface="Calibri" charset="0"/>
-                        <a:cs typeface="Calibri" charset="0"/>
-                      </a:endParaRPr>
-                    </a:p>
-                  </a:txBody>
-                  <a:tcPr marL="7315200" marR="7315200" marT="0" marB="0" anchor="ctr">
-                    <a:lnL w="12700" cap="flat" cmpd="sng" algn="ctr">
-                      <a:solidFill>
-                        <a:srgbClr val="DCE0F0"/>
-                      </a:solidFill>
-                      <a:prstDash val="solid"/>
-                      <a:round/>
-                      <a:headEnd type="none" w="med" len="med"/>
-                      <a:tailEnd type="none" w="med" len="med"/>
-                    </a:lnL>
-                    <a:lnR w="12700" cap="flat" cmpd="sng" algn="ctr">
-                      <a:solidFill>
-                        <a:srgbClr val="DCE0F0"/>
-                      </a:solidFill>
-                      <a:prstDash val="solid"/>
-                      <a:round/>
-                      <a:headEnd type="none" w="med" len="med"/>
-                      <a:tailEnd type="none" w="med" len="med"/>
-                    </a:lnR>
-                    <a:lnT w="12700" cap="flat" cmpd="sng" algn="ctr">
-                      <a:solidFill>
-                        <a:srgbClr val="DCE0F0"/>
-                      </a:solidFill>
-                      <a:prstDash val="solid"/>
-                      <a:round/>
-                      <a:headEnd type="none" w="med" len="med"/>
-                      <a:tailEnd type="none" w="med" len="med"/>
-                    </a:lnT>
-                    <a:lnB w="12700" cap="flat" cmpd="sng" algn="ctr">
-                      <a:solidFill>
-                        <a:srgbClr val="DCE0F0"/>
-                      </a:solidFill>
-                      <a:prstDash val="solid"/>
-                      <a:round/>
-                      <a:headEnd type="none" w="med" len="med"/>
-                      <a:tailEnd type="none" w="med" len="med"/>
-                    </a:lnB>
-                    <a:solidFill>
-                      <a:srgbClr val="312783"/>
-                    </a:solidFill>
-                  </a:tcPr>
-                </a:tc>
-                <a:tc>
-                  <a:txBody>
-                    <a:bodyPr/>
-                    <a:lstStyle/>
-                    <a:p>
-                      <a:pPr algn="ctr" indent="0" marL="0">
-                        <a:buNone/>
-                      </a:pPr>
-                      <a:r>
-                        <a:rPr lang="en-US" sz="1300" b="1" dirty="0">
-                          <a:solidFill>
-                            <a:srgbClr val="FFFFFF"/>
-                          </a:solidFill>
-                          <a:latin typeface="Calibri" pitchFamily="34" charset="0"/>
-                          <a:ea typeface="Calibri" pitchFamily="34" charset="-122"/>
-                          <a:cs typeface="Calibri" pitchFamily="34" charset="-120"/>
-                        </a:rPr>
-                        <a:t>Изменение</a:t>
-                      </a:r>
-                      <a:endParaRPr lang="en-US" sz="1300" dirty="0">
-                        <a:latin typeface="Calibri" charset="0"/>
-                        <a:ea typeface="Calibri" charset="0"/>
-                        <a:cs typeface="Calibri" charset="0"/>
-                      </a:endParaRPr>
-                    </a:p>
-                  </a:txBody>
-                  <a:tcPr marL="7315200" marR="7315200" marT="0" marB="0" anchor="ctr">
-                    <a:lnL w="12700" cap="flat" cmpd="sng" algn="ctr">
-                      <a:solidFill>
-                        <a:srgbClr val="DCE0F0"/>
-                      </a:solidFill>
-                      <a:prstDash val="solid"/>
-                      <a:round/>
-                      <a:headEnd type="none" w="med" len="med"/>
-                      <a:tailEnd type="none" w="med" len="med"/>
-                    </a:lnL>
-                    <a:lnR w="12700" cap="flat" cmpd="sng" algn="ctr">
-                      <a:solidFill>
-                        <a:srgbClr val="DCE0F0"/>
-                      </a:solidFill>
-                      <a:prstDash val="solid"/>
-                      <a:round/>
-                      <a:headEnd type="none" w="med" len="med"/>
-                      <a:tailEnd type="none" w="med" len="med"/>
-                    </a:lnR>
-                    <a:lnT w="12700" cap="flat" cmpd="sng" algn="ctr">
-                      <a:solidFill>
-                        <a:srgbClr val="DCE0F0"/>
-                      </a:solidFill>
-                      <a:prstDash val="solid"/>
-                      <a:round/>
-                      <a:headEnd type="none" w="med" len="med"/>
-                      <a:tailEnd type="none" w="med" len="med"/>
-                    </a:lnT>
-                    <a:lnB w="12700" cap="flat" cmpd="sng" algn="ctr">
-                      <a:solidFill>
-                        <a:srgbClr val="DCE0F0"/>
-                      </a:solidFill>
-                      <a:prstDash val="solid"/>
-                      <a:round/>
-                      <a:headEnd type="none" w="med" len="med"/>
-                      <a:tailEnd type="none" w="med" len="med"/>
-                    </a:lnB>
-                    <a:solidFill>
-                      <a:srgbClr val="312783"/>
-                    </a:solidFill>
-                  </a:tcPr>
-                </a:tc>
-              </a:tr>
-              <a:tr h="384048">
-                <a:tc>
-                  <a:txBody>
-                    <a:bodyPr/>
-                    <a:lstStyle/>
-                    <a:p>
-                      <a:pPr algn="l" indent="0" marL="0">
-                        <a:buNone/>
-                      </a:pPr>
-                      <a:r>
-                        <a:rPr lang="en-US" sz="1300" b="1" dirty="0">
-                          <a:solidFill>
-                            <a:srgbClr val="241C5C"/>
-                          </a:solidFill>
-                          <a:latin typeface="Calibri" pitchFamily="34" charset="0"/>
-                          <a:ea typeface="Calibri" pitchFamily="34" charset="-122"/>
-                          <a:cs typeface="Calibri" pitchFamily="34" charset="-120"/>
-                        </a:rPr>
-                        <a:t>Ирина</a:t>
-                      </a:r>
-                      <a:endParaRPr lang="en-US" sz="1300" dirty="0">
-                        <a:latin typeface="Calibri" charset="0"/>
-                        <a:ea typeface="Calibri" charset="0"/>
-                        <a:cs typeface="Calibri" charset="0"/>
-                      </a:endParaRPr>
-                    </a:p>
-                  </a:txBody>
-                  <a:tcPr marL="7315200" marR="7315200" marT="0" marB="0" anchor="ctr">
-                    <a:lnL w="12700" cap="flat" cmpd="sng" algn="ctr">
-                      <a:solidFill>
-                        <a:srgbClr val="DCE0F0"/>
-                      </a:solidFill>
-                      <a:prstDash val="solid"/>
-                      <a:round/>
-                      <a:headEnd type="none" w="med" len="med"/>
-                      <a:tailEnd type="none" w="med" len="med"/>
-                    </a:lnL>
-                    <a:lnR w="12700" cap="flat" cmpd="sng" algn="ctr">
-                      <a:solidFill>
-                        <a:srgbClr val="DCE0F0"/>
-                      </a:solidFill>
-                      <a:prstDash val="solid"/>
-                      <a:round/>
-                      <a:headEnd type="none" w="med" len="med"/>
-                      <a:tailEnd type="none" w="med" len="med"/>
-                    </a:lnR>
-                    <a:lnT w="12700" cap="flat" cmpd="sng" algn="ctr">
-                      <a:solidFill>
-                        <a:srgbClr val="DCE0F0"/>
-                      </a:solidFill>
-                      <a:prstDash val="solid"/>
-                      <a:round/>
-                      <a:headEnd type="none" w="med" len="med"/>
-                      <a:tailEnd type="none" w="med" len="med"/>
-                    </a:lnT>
-                    <a:lnB w="12700" cap="flat" cmpd="sng" algn="ctr">
-                      <a:solidFill>
-                        <a:srgbClr val="DCE0F0"/>
-                      </a:solidFill>
-                      <a:prstDash val="solid"/>
-                      <a:round/>
-                      <a:headEnd type="none" w="med" len="med"/>
-                      <a:tailEnd type="none" w="med" len="med"/>
-                    </a:lnB>
-                  </a:tcPr>
-                </a:tc>
-                <a:tc>
-                  <a:txBody>
-                    <a:bodyPr/>
-                    <a:lstStyle/>
-                    <a:p>
-                      <a:pPr algn="ctr" indent="0" marL="0">
-                        <a:buNone/>
-                      </a:pPr>
-                      <a:r>
-                        <a:rPr lang="en-US" sz="1300" dirty="0">
-                          <a:solidFill>
-                            <a:srgbClr val="45415F"/>
-                          </a:solidFill>
-                          <a:latin typeface="Calibri" pitchFamily="34" charset="0"/>
-                          <a:ea typeface="Calibri" pitchFamily="34" charset="-122"/>
-                          <a:cs typeface="Calibri" pitchFamily="34" charset="-120"/>
-                        </a:rPr>
-                        <a:t>208</a:t>
-                      </a:r>
-                      <a:endParaRPr lang="en-US" sz="1300" dirty="0">
-                        <a:latin typeface="Calibri" charset="0"/>
-                        <a:ea typeface="Calibri" charset="0"/>
-                        <a:cs typeface="Calibri" charset="0"/>
-                      </a:endParaRPr>
-                    </a:p>
-                  </a:txBody>
-                  <a:tcPr marL="7315200" marR="7315200" marT="0" marB="0" anchor="ctr">
-                    <a:lnL w="12700" cap="flat" cmpd="sng" algn="ctr">
-                      <a:solidFill>
-                        <a:srgbClr val="DCE0F0"/>
-                      </a:solidFill>
-                      <a:prstDash val="solid"/>
-                      <a:round/>
-                      <a:headEnd type="none" w="med" len="med"/>
-                      <a:tailEnd type="none" w="med" len="med"/>
-                    </a:lnL>
-                    <a:lnR w="12700" cap="flat" cmpd="sng" algn="ctr">
-                      <a:solidFill>
-                        <a:srgbClr val="DCE0F0"/>
-                      </a:solidFill>
-                      <a:prstDash val="solid"/>
-                      <a:round/>
-                      <a:headEnd type="none" w="med" len="med"/>
-                      <a:tailEnd type="none" w="med" len="med"/>
-                    </a:lnR>
-                    <a:lnT w="12700" cap="flat" cmpd="sng" algn="ctr">
-                      <a:solidFill>
-                        <a:srgbClr val="DCE0F0"/>
-                      </a:solidFill>
-                      <a:prstDash val="solid"/>
-                      <a:round/>
-                      <a:headEnd type="none" w="med" len="med"/>
-                      <a:tailEnd type="none" w="med" len="med"/>
-                    </a:lnT>
-                    <a:lnB w="12700" cap="flat" cmpd="sng" algn="ctr">
-                      <a:solidFill>
-                        <a:srgbClr val="DCE0F0"/>
-                      </a:solidFill>
-                      <a:prstDash val="solid"/>
-                      <a:round/>
-                      <a:headEnd type="none" w="med" len="med"/>
-                      <a:tailEnd type="none" w="med" len="med"/>
-                    </a:lnB>
-                  </a:tcPr>
-                </a:tc>
-                <a:tc>
-                  <a:txBody>
-                    <a:bodyPr/>
-                    <a:lstStyle/>
-                    <a:p>
-                      <a:pPr algn="ctr" indent="0" marL="0">
-                        <a:buNone/>
-                      </a:pPr>
-                      <a:r>
-                        <a:rPr lang="en-US" sz="1300" b="1" dirty="0">
-                          <a:solidFill>
-                            <a:srgbClr val="312783"/>
-                          </a:solidFill>
-                          <a:latin typeface="Calibri" pitchFamily="34" charset="0"/>
-                          <a:ea typeface="Calibri" pitchFamily="34" charset="-122"/>
-                          <a:cs typeface="Calibri" pitchFamily="34" charset="-120"/>
-                        </a:rPr>
-                        <a:t>73</a:t>
-                      </a:r>
-                      <a:endParaRPr lang="en-US" sz="1300" dirty="0">
-                        <a:latin typeface="Calibri" charset="0"/>
-                        <a:ea typeface="Calibri" charset="0"/>
-                        <a:cs typeface="Calibri" charset="0"/>
-                      </a:endParaRPr>
-                    </a:p>
-                  </a:txBody>
-                  <a:tcPr marL="7315200" marR="7315200" marT="0" marB="0" anchor="ctr">
-                    <a:lnL w="12700" cap="flat" cmpd="sng" algn="ctr">
-                      <a:solidFill>
-                        <a:srgbClr val="DCE0F0"/>
-                      </a:solidFill>
-                      <a:prstDash val="solid"/>
-                      <a:round/>
-                      <a:headEnd type="none" w="med" len="med"/>
-                      <a:tailEnd type="none" w="med" len="med"/>
-                    </a:lnL>
-                    <a:lnR w="12700" cap="flat" cmpd="sng" algn="ctr">
-                      <a:solidFill>
-                        <a:srgbClr val="DCE0F0"/>
-                      </a:solidFill>
-                      <a:prstDash val="solid"/>
-                      <a:round/>
-                      <a:headEnd type="none" w="med" len="med"/>
-                      <a:tailEnd type="none" w="med" len="med"/>
-                    </a:lnR>
-                    <a:lnT w="12700" cap="flat" cmpd="sng" algn="ctr">
-                      <a:solidFill>
-                        <a:srgbClr val="DCE0F0"/>
-                      </a:solidFill>
-                      <a:prstDash val="solid"/>
-                      <a:round/>
-                      <a:headEnd type="none" w="med" len="med"/>
-                      <a:tailEnd type="none" w="med" len="med"/>
-                    </a:lnT>
-                    <a:lnB w="12700" cap="flat" cmpd="sng" algn="ctr">
-                      <a:solidFill>
-                        <a:srgbClr val="DCE0F0"/>
-                      </a:solidFill>
-                      <a:prstDash val="solid"/>
-                      <a:round/>
-                      <a:headEnd type="none" w="med" len="med"/>
-                      <a:tailEnd type="none" w="med" len="med"/>
-                    </a:lnB>
-                  </a:tcPr>
-                </a:tc>
-                <a:tc>
-                  <a:txBody>
-                    <a:bodyPr/>
-                    <a:lstStyle/>
-                    <a:p>
-                      <a:pPr algn="ctr" indent="0" marL="0">
-                        <a:buNone/>
-                      </a:pPr>
-                      <a:r>
-                        <a:rPr lang="en-US" sz="1300" b="1" dirty="0">
-                          <a:solidFill>
-                            <a:srgbClr val="7DB928"/>
-                          </a:solidFill>
-                          <a:latin typeface="Calibri" pitchFamily="34" charset="0"/>
-                          <a:ea typeface="Calibri" pitchFamily="34" charset="-122"/>
-                          <a:cs typeface="Calibri" pitchFamily="34" charset="-120"/>
-                        </a:rPr>
-                        <a:t>−135</a:t>
-                      </a:r>
-                      <a:endParaRPr lang="en-US" sz="1300" dirty="0">
-                        <a:latin typeface="Calibri" charset="0"/>
-                        <a:ea typeface="Calibri" charset="0"/>
-                        <a:cs typeface="Calibri" charset="0"/>
-                      </a:endParaRPr>
-                    </a:p>
-                  </a:txBody>
-                  <a:tcPr marL="7315200" marR="7315200" marT="0" marB="0" anchor="ctr">
-                    <a:lnL w="12700" cap="flat" cmpd="sng" algn="ctr">
-                      <a:solidFill>
-                        <a:srgbClr val="DCE0F0"/>
-                      </a:solidFill>
-                      <a:prstDash val="solid"/>
-                      <a:round/>
-                      <a:headEnd type="none" w="med" len="med"/>
-                      <a:tailEnd type="none" w="med" len="med"/>
-                    </a:lnL>
-                    <a:lnR w="12700" cap="flat" cmpd="sng" algn="ctr">
-                      <a:solidFill>
-                        <a:srgbClr val="DCE0F0"/>
-                      </a:solidFill>
-                      <a:prstDash val="solid"/>
-                      <a:round/>
-                      <a:headEnd type="none" w="med" len="med"/>
-                      <a:tailEnd type="none" w="med" len="med"/>
-                    </a:lnR>
-                    <a:lnT w="12700" cap="flat" cmpd="sng" algn="ctr">
-                      <a:solidFill>
-                        <a:srgbClr val="DCE0F0"/>
-                      </a:solidFill>
-                      <a:prstDash val="solid"/>
-                      <a:round/>
-                      <a:headEnd type="none" w="med" len="med"/>
-                      <a:tailEnd type="none" w="med" len="med"/>
-                    </a:lnT>
-                    <a:lnB w="12700" cap="flat" cmpd="sng" algn="ctr">
-                      <a:solidFill>
-                        <a:srgbClr val="DCE0F0"/>
-                      </a:solidFill>
-                      <a:prstDash val="solid"/>
-                      <a:round/>
-                      <a:headEnd type="none" w="med" len="med"/>
-                      <a:tailEnd type="none" w="med" len="med"/>
-                    </a:lnB>
-                  </a:tcPr>
-                </a:tc>
-              </a:tr>
-              <a:tr h="384048">
-                <a:tc>
-                  <a:txBody>
-                    <a:bodyPr/>
-                    <a:lstStyle/>
-                    <a:p>
-                      <a:pPr algn="l" indent="0" marL="0">
-                        <a:buNone/>
-                      </a:pPr>
-                      <a:r>
-                        <a:rPr lang="en-US" sz="1300" b="1" dirty="0">
-                          <a:solidFill>
-                            <a:srgbClr val="241C5C"/>
-                          </a:solidFill>
-                          <a:latin typeface="Calibri" pitchFamily="34" charset="0"/>
-                          <a:ea typeface="Calibri" pitchFamily="34" charset="-122"/>
-                          <a:cs typeface="Calibri" pitchFamily="34" charset="-120"/>
-                        </a:rPr>
-                        <a:t>Анна</a:t>
-                      </a:r>
-                      <a:endParaRPr lang="en-US" sz="1300" dirty="0">
-                        <a:latin typeface="Calibri" charset="0"/>
-                        <a:ea typeface="Calibri" charset="0"/>
-                        <a:cs typeface="Calibri" charset="0"/>
-                      </a:endParaRPr>
-                    </a:p>
-                  </a:txBody>
-                  <a:tcPr marL="7315200" marR="7315200" marT="0" marB="0" anchor="ctr">
-                    <a:lnL w="12700" cap="flat" cmpd="sng" algn="ctr">
-                      <a:solidFill>
-                        <a:srgbClr val="DCE0F0"/>
-                      </a:solidFill>
-                      <a:prstDash val="solid"/>
-                      <a:round/>
-                      <a:headEnd type="none" w="med" len="med"/>
-                      <a:tailEnd type="none" w="med" len="med"/>
-                    </a:lnL>
-                    <a:lnR w="12700" cap="flat" cmpd="sng" algn="ctr">
-                      <a:solidFill>
-                        <a:srgbClr val="DCE0F0"/>
-                      </a:solidFill>
-                      <a:prstDash val="solid"/>
-                      <a:round/>
-                      <a:headEnd type="none" w="med" len="med"/>
-                      <a:tailEnd type="none" w="med" len="med"/>
-                    </a:lnR>
-                    <a:lnT w="12700" cap="flat" cmpd="sng" algn="ctr">
-                      <a:solidFill>
-                        <a:srgbClr val="DCE0F0"/>
-                      </a:solidFill>
-                      <a:prstDash val="solid"/>
-                      <a:round/>
-                      <a:headEnd type="none" w="med" len="med"/>
-                      <a:tailEnd type="none" w="med" len="med"/>
-                    </a:lnT>
-                    <a:lnB w="12700" cap="flat" cmpd="sng" algn="ctr">
-                      <a:solidFill>
-                        <a:srgbClr val="DCE0F0"/>
-                      </a:solidFill>
-                      <a:prstDash val="solid"/>
-                      <a:round/>
-                      <a:headEnd type="none" w="med" len="med"/>
-                      <a:tailEnd type="none" w="med" len="med"/>
-                    </a:lnB>
-                  </a:tcPr>
-                </a:tc>
-                <a:tc>
-                  <a:txBody>
-                    <a:bodyPr/>
-                    <a:lstStyle/>
-                    <a:p>
-                      <a:pPr algn="ctr" indent="0" marL="0">
-                        <a:buNone/>
-                      </a:pPr>
-                      <a:r>
-                        <a:rPr lang="en-US" sz="1300" dirty="0">
-                          <a:solidFill>
-                            <a:srgbClr val="45415F"/>
-                          </a:solidFill>
-                          <a:latin typeface="Calibri" pitchFamily="34" charset="0"/>
-                          <a:ea typeface="Calibri" pitchFamily="34" charset="-122"/>
-                          <a:cs typeface="Calibri" pitchFamily="34" charset="-120"/>
-                        </a:rPr>
-                        <a:t>253</a:t>
-                      </a:r>
-                      <a:endParaRPr lang="en-US" sz="1300" dirty="0">
-                        <a:latin typeface="Calibri" charset="0"/>
-                        <a:ea typeface="Calibri" charset="0"/>
-                        <a:cs typeface="Calibri" charset="0"/>
-                      </a:endParaRPr>
-                    </a:p>
-                  </a:txBody>
-                  <a:tcPr marL="7315200" marR="7315200" marT="0" marB="0" anchor="ctr">
-                    <a:lnL w="12700" cap="flat" cmpd="sng" algn="ctr">
-                      <a:solidFill>
-                        <a:srgbClr val="DCE0F0"/>
-                      </a:solidFill>
-                      <a:prstDash val="solid"/>
-                      <a:round/>
-                      <a:headEnd type="none" w="med" len="med"/>
-                      <a:tailEnd type="none" w="med" len="med"/>
-                    </a:lnL>
-                    <a:lnR w="12700" cap="flat" cmpd="sng" algn="ctr">
-                      <a:solidFill>
-                        <a:srgbClr val="DCE0F0"/>
-                      </a:solidFill>
-                      <a:prstDash val="solid"/>
-                      <a:round/>
-                      <a:headEnd type="none" w="med" len="med"/>
-                      <a:tailEnd type="none" w="med" len="med"/>
-                    </a:lnR>
-                    <a:lnT w="12700" cap="flat" cmpd="sng" algn="ctr">
-                      <a:solidFill>
-                        <a:srgbClr val="DCE0F0"/>
-                      </a:solidFill>
-                      <a:prstDash val="solid"/>
-                      <a:round/>
-                      <a:headEnd type="none" w="med" len="med"/>
-                      <a:tailEnd type="none" w="med" len="med"/>
-                    </a:lnT>
-                    <a:lnB w="12700" cap="flat" cmpd="sng" algn="ctr">
-                      <a:solidFill>
-                        <a:srgbClr val="DCE0F0"/>
-                      </a:solidFill>
-                      <a:prstDash val="solid"/>
-                      <a:round/>
-                      <a:headEnd type="none" w="med" len="med"/>
-                      <a:tailEnd type="none" w="med" len="med"/>
-                    </a:lnB>
-                  </a:tcPr>
-                </a:tc>
-                <a:tc>
-                  <a:txBody>
-                    <a:bodyPr/>
-                    <a:lstStyle/>
-                    <a:p>
-                      <a:pPr algn="ctr" indent="0" marL="0">
-                        <a:buNone/>
-                      </a:pPr>
-                      <a:r>
-                        <a:rPr lang="en-US" sz="1300" b="1" dirty="0">
-                          <a:solidFill>
-                            <a:srgbClr val="312783"/>
-                          </a:solidFill>
-                          <a:latin typeface="Calibri" pitchFamily="34" charset="0"/>
-                          <a:ea typeface="Calibri" pitchFamily="34" charset="-122"/>
-                          <a:cs typeface="Calibri" pitchFamily="34" charset="-120"/>
-                        </a:rPr>
-                        <a:t>108</a:t>
-                      </a:r>
-                      <a:endParaRPr lang="en-US" sz="1300" dirty="0">
-                        <a:latin typeface="Calibri" charset="0"/>
-                        <a:ea typeface="Calibri" charset="0"/>
-                        <a:cs typeface="Calibri" charset="0"/>
-                      </a:endParaRPr>
-                    </a:p>
-                  </a:txBody>
-                  <a:tcPr marL="7315200" marR="7315200" marT="0" marB="0" anchor="ctr">
-                    <a:lnL w="12700" cap="flat" cmpd="sng" algn="ctr">
-                      <a:solidFill>
-                        <a:srgbClr val="DCE0F0"/>
-                      </a:solidFill>
-                      <a:prstDash val="solid"/>
-                      <a:round/>
-                      <a:headEnd type="none" w="med" len="med"/>
-                      <a:tailEnd type="none" w="med" len="med"/>
-                    </a:lnL>
-                    <a:lnR w="12700" cap="flat" cmpd="sng" algn="ctr">
-                      <a:solidFill>
-                        <a:srgbClr val="DCE0F0"/>
-                      </a:solidFill>
-                      <a:prstDash val="solid"/>
-                      <a:round/>
-                      <a:headEnd type="none" w="med" len="med"/>
-                      <a:tailEnd type="none" w="med" len="med"/>
-                    </a:lnR>
-                    <a:lnT w="12700" cap="flat" cmpd="sng" algn="ctr">
-                      <a:solidFill>
-                        <a:srgbClr val="DCE0F0"/>
-                      </a:solidFill>
-                      <a:prstDash val="solid"/>
-                      <a:round/>
-                      <a:headEnd type="none" w="med" len="med"/>
-                      <a:tailEnd type="none" w="med" len="med"/>
-                    </a:lnT>
-                    <a:lnB w="12700" cap="flat" cmpd="sng" algn="ctr">
-                      <a:solidFill>
-                        <a:srgbClr val="DCE0F0"/>
-                      </a:solidFill>
-                      <a:prstDash val="solid"/>
-                      <a:round/>
-                      <a:headEnd type="none" w="med" len="med"/>
-                      <a:tailEnd type="none" w="med" len="med"/>
-                    </a:lnB>
-                  </a:tcPr>
-                </a:tc>
-                <a:tc>
-                  <a:txBody>
-                    <a:bodyPr/>
-                    <a:lstStyle/>
-                    <a:p>
-                      <a:pPr algn="ctr" indent="0" marL="0">
-                        <a:buNone/>
-                      </a:pPr>
-                      <a:r>
-                        <a:rPr lang="en-US" sz="1300" b="1" dirty="0">
-                          <a:solidFill>
-                            <a:srgbClr val="7DB928"/>
-                          </a:solidFill>
-                          <a:latin typeface="Calibri" pitchFamily="34" charset="0"/>
-                          <a:ea typeface="Calibri" pitchFamily="34" charset="-122"/>
-                          <a:cs typeface="Calibri" pitchFamily="34" charset="-120"/>
-                        </a:rPr>
-                        <a:t>−145</a:t>
-                      </a:r>
-                      <a:endParaRPr lang="en-US" sz="1300" dirty="0">
-                        <a:latin typeface="Calibri" charset="0"/>
-                        <a:ea typeface="Calibri" charset="0"/>
-                        <a:cs typeface="Calibri" charset="0"/>
-                      </a:endParaRPr>
-                    </a:p>
-                  </a:txBody>
-                  <a:tcPr marL="7315200" marR="7315200" marT="0" marB="0" anchor="ctr">
-                    <a:lnL w="12700" cap="flat" cmpd="sng" algn="ctr">
-                      <a:solidFill>
-                        <a:srgbClr val="DCE0F0"/>
-                      </a:solidFill>
-                      <a:prstDash val="solid"/>
-                      <a:round/>
-                      <a:headEnd type="none" w="med" len="med"/>
-                      <a:tailEnd type="none" w="med" len="med"/>
-                    </a:lnL>
-                    <a:lnR w="12700" cap="flat" cmpd="sng" algn="ctr">
-                      <a:solidFill>
-                        <a:srgbClr val="DCE0F0"/>
-                      </a:solidFill>
-                      <a:prstDash val="solid"/>
-                      <a:round/>
-                      <a:headEnd type="none" w="med" len="med"/>
-                      <a:tailEnd type="none" w="med" len="med"/>
-                    </a:lnR>
-                    <a:lnT w="12700" cap="flat" cmpd="sng" algn="ctr">
-                      <a:solidFill>
-                        <a:srgbClr val="DCE0F0"/>
-                      </a:solidFill>
-                      <a:prstDash val="solid"/>
-                      <a:round/>
-                      <a:headEnd type="none" w="med" len="med"/>
-                      <a:tailEnd type="none" w="med" len="med"/>
-                    </a:lnT>
-                    <a:lnB w="12700" cap="flat" cmpd="sng" algn="ctr">
-                      <a:solidFill>
-                        <a:srgbClr val="DCE0F0"/>
-                      </a:solidFill>
-                      <a:prstDash val="solid"/>
-                      <a:round/>
-                      <a:headEnd type="none" w="med" len="med"/>
-                      <a:tailEnd type="none" w="med" len="med"/>
-                    </a:lnB>
-                  </a:tcPr>
-                </a:tc>
-              </a:tr>
-              <a:tr h="384048">
-                <a:tc>
-                  <a:txBody>
-                    <a:bodyPr/>
-                    <a:lstStyle/>
-                    <a:p>
-                      <a:pPr algn="l" indent="0" marL="0">
-                        <a:buNone/>
-                      </a:pPr>
-                      <a:r>
-                        <a:rPr lang="en-US" sz="1300" b="1" dirty="0">
-                          <a:solidFill>
-                            <a:srgbClr val="241C5C"/>
-                          </a:solidFill>
-                          <a:latin typeface="Calibri" pitchFamily="34" charset="0"/>
-                          <a:ea typeface="Calibri" pitchFamily="34" charset="-122"/>
-                          <a:cs typeface="Calibri" pitchFamily="34" charset="-120"/>
-                        </a:rPr>
-                        <a:t>Елена</a:t>
-                      </a:r>
-                      <a:endParaRPr lang="en-US" sz="1300" dirty="0">
-                        <a:latin typeface="Calibri" charset="0"/>
-                        <a:ea typeface="Calibri" charset="0"/>
-                        <a:cs typeface="Calibri" charset="0"/>
-                      </a:endParaRPr>
-                    </a:p>
-                  </a:txBody>
-                  <a:tcPr marL="7315200" marR="7315200" marT="0" marB="0" anchor="ctr">
-                    <a:lnL w="12700" cap="flat" cmpd="sng" algn="ctr">
-                      <a:solidFill>
-                        <a:srgbClr val="DCE0F0"/>
-                      </a:solidFill>
-                      <a:prstDash val="solid"/>
-                      <a:round/>
-                      <a:headEnd type="none" w="med" len="med"/>
-                      <a:tailEnd type="none" w="med" len="med"/>
-                    </a:lnL>
-                    <a:lnR w="12700" cap="flat" cmpd="sng" algn="ctr">
-                      <a:solidFill>
-                        <a:srgbClr val="DCE0F0"/>
-                      </a:solidFill>
-                      <a:prstDash val="solid"/>
-                      <a:round/>
-                      <a:headEnd type="none" w="med" len="med"/>
-                      <a:tailEnd type="none" w="med" len="med"/>
-                    </a:lnR>
-                    <a:lnT w="12700" cap="flat" cmpd="sng" algn="ctr">
-                      <a:solidFill>
-                        <a:srgbClr val="DCE0F0"/>
-                      </a:solidFill>
-                      <a:prstDash val="solid"/>
-                      <a:round/>
-                      <a:headEnd type="none" w="med" len="med"/>
-                      <a:tailEnd type="none" w="med" len="med"/>
-                    </a:lnT>
-                    <a:lnB w="12700" cap="flat" cmpd="sng" algn="ctr">
-                      <a:solidFill>
-                        <a:srgbClr val="DCE0F0"/>
-                      </a:solidFill>
-                      <a:prstDash val="solid"/>
-                      <a:round/>
-                      <a:headEnd type="none" w="med" len="med"/>
-                      <a:tailEnd type="none" w="med" len="med"/>
-                    </a:lnB>
-                  </a:tcPr>
-                </a:tc>
-                <a:tc>
-                  <a:txBody>
-                    <a:bodyPr/>
-                    <a:lstStyle/>
-                    <a:p>
-                      <a:pPr algn="ctr" indent="0" marL="0">
-                        <a:buNone/>
-                      </a:pPr>
-                      <a:r>
-                        <a:rPr lang="en-US" sz="1300" dirty="0">
-                          <a:solidFill>
-                            <a:srgbClr val="45415F"/>
-                          </a:solidFill>
-                          <a:latin typeface="Calibri" pitchFamily="34" charset="0"/>
-                          <a:ea typeface="Calibri" pitchFamily="34" charset="-122"/>
-                          <a:cs typeface="Calibri" pitchFamily="34" charset="-120"/>
-                        </a:rPr>
-                        <a:t>151</a:t>
-                      </a:r>
-                      <a:endParaRPr lang="en-US" sz="1300" dirty="0">
-                        <a:latin typeface="Calibri" charset="0"/>
-                        <a:ea typeface="Calibri" charset="0"/>
-                        <a:cs typeface="Calibri" charset="0"/>
-                      </a:endParaRPr>
-                    </a:p>
-                  </a:txBody>
-                  <a:tcPr marL="7315200" marR="7315200" marT="0" marB="0" anchor="ctr">
-                    <a:lnL w="12700" cap="flat" cmpd="sng" algn="ctr">
-                      <a:solidFill>
-                        <a:srgbClr val="DCE0F0"/>
-                      </a:solidFill>
-                      <a:prstDash val="solid"/>
-                      <a:round/>
-                      <a:headEnd type="none" w="med" len="med"/>
-                      <a:tailEnd type="none" w="med" len="med"/>
-                    </a:lnL>
-                    <a:lnR w="12700" cap="flat" cmpd="sng" algn="ctr">
-                      <a:solidFill>
-                        <a:srgbClr val="DCE0F0"/>
-                      </a:solidFill>
-                      <a:prstDash val="solid"/>
-                      <a:round/>
-                      <a:headEnd type="none" w="med" len="med"/>
-                      <a:tailEnd type="none" w="med" len="med"/>
-                    </a:lnR>
-                    <a:lnT w="12700" cap="flat" cmpd="sng" algn="ctr">
-                      <a:solidFill>
-                        <a:srgbClr val="DCE0F0"/>
-                      </a:solidFill>
-                      <a:prstDash val="solid"/>
-                      <a:round/>
-                      <a:headEnd type="none" w="med" len="med"/>
-                      <a:tailEnd type="none" w="med" len="med"/>
-                    </a:lnT>
-                    <a:lnB w="12700" cap="flat" cmpd="sng" algn="ctr">
-                      <a:solidFill>
-                        <a:srgbClr val="DCE0F0"/>
-                      </a:solidFill>
-                      <a:prstDash val="solid"/>
-                      <a:round/>
-                      <a:headEnd type="none" w="med" len="med"/>
-                      <a:tailEnd type="none" w="med" len="med"/>
-                    </a:lnB>
-                  </a:tcPr>
-                </a:tc>
-                <a:tc>
-                  <a:txBody>
-                    <a:bodyPr/>
-                    <a:lstStyle/>
-                    <a:p>
-                      <a:pPr algn="ctr" indent="0" marL="0">
-                        <a:buNone/>
-                      </a:pPr>
-                      <a:r>
-                        <a:rPr lang="en-US" sz="1300" b="1" dirty="0">
-                          <a:solidFill>
-                            <a:srgbClr val="312783"/>
-                          </a:solidFill>
-                          <a:latin typeface="Calibri" pitchFamily="34" charset="0"/>
-                          <a:ea typeface="Calibri" pitchFamily="34" charset="-122"/>
-                          <a:cs typeface="Calibri" pitchFamily="34" charset="-120"/>
-                        </a:rPr>
-                        <a:t>84</a:t>
-                      </a:r>
-                      <a:endParaRPr lang="en-US" sz="1300" dirty="0">
-                        <a:latin typeface="Calibri" charset="0"/>
-                        <a:ea typeface="Calibri" charset="0"/>
-                        <a:cs typeface="Calibri" charset="0"/>
-                      </a:endParaRPr>
-                    </a:p>
-                  </a:txBody>
-                  <a:tcPr marL="7315200" marR="7315200" marT="0" marB="0" anchor="ctr">
-                    <a:lnL w="12700" cap="flat" cmpd="sng" algn="ctr">
-                      <a:solidFill>
-                        <a:srgbClr val="DCE0F0"/>
-                      </a:solidFill>
-                      <a:prstDash val="solid"/>
-                      <a:round/>
-                      <a:headEnd type="none" w="med" len="med"/>
-                      <a:tailEnd type="none" w="med" len="med"/>
-                    </a:lnL>
-                    <a:lnR w="12700" cap="flat" cmpd="sng" algn="ctr">
-                      <a:solidFill>
-                        <a:srgbClr val="DCE0F0"/>
-                      </a:solidFill>
-                      <a:prstDash val="solid"/>
-                      <a:round/>
-                      <a:headEnd type="none" w="med" len="med"/>
-                      <a:tailEnd type="none" w="med" len="med"/>
-                    </a:lnR>
-                    <a:lnT w="12700" cap="flat" cmpd="sng" algn="ctr">
-                      <a:solidFill>
-                        <a:srgbClr val="DCE0F0"/>
-                      </a:solidFill>
-                      <a:prstDash val="solid"/>
-                      <a:round/>
-                      <a:headEnd type="none" w="med" len="med"/>
-                      <a:tailEnd type="none" w="med" len="med"/>
-                    </a:lnT>
-                    <a:lnB w="12700" cap="flat" cmpd="sng" algn="ctr">
-                      <a:solidFill>
-                        <a:srgbClr val="DCE0F0"/>
-                      </a:solidFill>
-                      <a:prstDash val="solid"/>
-                      <a:round/>
-                      <a:headEnd type="none" w="med" len="med"/>
-                      <a:tailEnd type="none" w="med" len="med"/>
-                    </a:lnB>
-                  </a:tcPr>
-                </a:tc>
-                <a:tc>
-                  <a:txBody>
-                    <a:bodyPr/>
-                    <a:lstStyle/>
-                    <a:p>
-                      <a:pPr algn="ctr" indent="0" marL="0">
-                        <a:buNone/>
-                      </a:pPr>
-                      <a:r>
-                        <a:rPr lang="en-US" sz="1300" b="1" dirty="0">
-                          <a:solidFill>
-                            <a:srgbClr val="7DB928"/>
-                          </a:solidFill>
-                          <a:latin typeface="Calibri" pitchFamily="34" charset="0"/>
-                          <a:ea typeface="Calibri" pitchFamily="34" charset="-122"/>
-                          <a:cs typeface="Calibri" pitchFamily="34" charset="-120"/>
-                        </a:rPr>
-                        <a:t>−67</a:t>
-                      </a:r>
-                      <a:endParaRPr lang="en-US" sz="1300" dirty="0">
-                        <a:latin typeface="Calibri" charset="0"/>
-                        <a:ea typeface="Calibri" charset="0"/>
-                        <a:cs typeface="Calibri" charset="0"/>
-                      </a:endParaRPr>
-                    </a:p>
-                  </a:txBody>
-                  <a:tcPr marL="7315200" marR="7315200" marT="0" marB="0" anchor="ctr">
-                    <a:lnL w="12700" cap="flat" cmpd="sng" algn="ctr">
-                      <a:solidFill>
-                        <a:srgbClr val="DCE0F0"/>
-                      </a:solidFill>
-                      <a:prstDash val="solid"/>
-                      <a:round/>
-                      <a:headEnd type="none" w="med" len="med"/>
-                      <a:tailEnd type="none" w="med" len="med"/>
-                    </a:lnL>
-                    <a:lnR w="12700" cap="flat" cmpd="sng" algn="ctr">
-                      <a:solidFill>
-                        <a:srgbClr val="DCE0F0"/>
-                      </a:solidFill>
-                      <a:prstDash val="solid"/>
-                      <a:round/>
-                      <a:headEnd type="none" w="med" len="med"/>
-                      <a:tailEnd type="none" w="med" len="med"/>
-                    </a:lnR>
-                    <a:lnT w="12700" cap="flat" cmpd="sng" algn="ctr">
-                      <a:solidFill>
-                        <a:srgbClr val="DCE0F0"/>
-                      </a:solidFill>
-                      <a:prstDash val="solid"/>
-                      <a:round/>
-                      <a:headEnd type="none" w="med" len="med"/>
-                      <a:tailEnd type="none" w="med" len="med"/>
-                    </a:lnT>
-                    <a:lnB w="12700" cap="flat" cmpd="sng" algn="ctr">
-                      <a:solidFill>
-                        <a:srgbClr val="DCE0F0"/>
-                      </a:solidFill>
-                      <a:prstDash val="solid"/>
-                      <a:round/>
-                      <a:headEnd type="none" w="med" len="med"/>
-                      <a:tailEnd type="none" w="med" len="med"/>
-                    </a:lnB>
-                  </a:tcPr>
-                </a:tc>
-              </a:tr>
-              <a:tr h="384048">
-                <a:tc>
-                  <a:txBody>
-                    <a:bodyPr/>
-                    <a:lstStyle/>
-                    <a:p>
-                      <a:pPr algn="l" indent="0" marL="0">
-                        <a:buNone/>
-                      </a:pPr>
-                      <a:r>
-                        <a:rPr lang="en-US" sz="1300" b="1" dirty="0">
-                          <a:solidFill>
-                            <a:srgbClr val="241C5C"/>
-                          </a:solidFill>
-                          <a:latin typeface="Calibri" pitchFamily="34" charset="0"/>
-                          <a:ea typeface="Calibri" pitchFamily="34" charset="-122"/>
-                          <a:cs typeface="Calibri" pitchFamily="34" charset="-120"/>
-                        </a:rPr>
-                        <a:t>Елизавета</a:t>
-                      </a:r>
-                      <a:endParaRPr lang="en-US" sz="1300" dirty="0">
-                        <a:latin typeface="Calibri" charset="0"/>
-                        <a:ea typeface="Calibri" charset="0"/>
-                        <a:cs typeface="Calibri" charset="0"/>
-                      </a:endParaRPr>
-                    </a:p>
-                  </a:txBody>
-                  <a:tcPr marL="7315200" marR="7315200" marT="0" marB="0" anchor="ctr">
-                    <a:lnL w="12700" cap="flat" cmpd="sng" algn="ctr">
-                      <a:solidFill>
-                        <a:srgbClr val="DCE0F0"/>
-                      </a:solidFill>
-                      <a:prstDash val="solid"/>
-                      <a:round/>
-                      <a:headEnd type="none" w="med" len="med"/>
-                      <a:tailEnd type="none" w="med" len="med"/>
-                    </a:lnL>
-                    <a:lnR w="12700" cap="flat" cmpd="sng" algn="ctr">
-                      <a:solidFill>
-                        <a:srgbClr val="DCE0F0"/>
-                      </a:solidFill>
-                      <a:prstDash val="solid"/>
-                      <a:round/>
-                      <a:headEnd type="none" w="med" len="med"/>
-                      <a:tailEnd type="none" w="med" len="med"/>
-                    </a:lnR>
-                    <a:lnT w="12700" cap="flat" cmpd="sng" algn="ctr">
-                      <a:solidFill>
-                        <a:srgbClr val="DCE0F0"/>
-                      </a:solidFill>
-                      <a:prstDash val="solid"/>
-                      <a:round/>
-                      <a:headEnd type="none" w="med" len="med"/>
-                      <a:tailEnd type="none" w="med" len="med"/>
-                    </a:lnT>
-                    <a:lnB w="12700" cap="flat" cmpd="sng" algn="ctr">
-                      <a:solidFill>
-                        <a:srgbClr val="DCE0F0"/>
-                      </a:solidFill>
-                      <a:prstDash val="solid"/>
-                      <a:round/>
-                      <a:headEnd type="none" w="med" len="med"/>
-                      <a:tailEnd type="none" w="med" len="med"/>
-                    </a:lnB>
-                  </a:tcPr>
-                </a:tc>
-                <a:tc>
-                  <a:txBody>
-                    <a:bodyPr/>
-                    <a:lstStyle/>
-                    <a:p>
-                      <a:pPr algn="ctr" indent="0" marL="0">
-                        <a:buNone/>
-                      </a:pPr>
-                      <a:r>
-                        <a:rPr lang="en-US" sz="1300" dirty="0">
-                          <a:solidFill>
-                            <a:srgbClr val="45415F"/>
-                          </a:solidFill>
-                          <a:latin typeface="Calibri" pitchFamily="34" charset="0"/>
-                          <a:ea typeface="Calibri" pitchFamily="34" charset="-122"/>
-                          <a:cs typeface="Calibri" pitchFamily="34" charset="-120"/>
-                        </a:rPr>
-                        <a:t>365</a:t>
-                      </a:r>
-                      <a:endParaRPr lang="en-US" sz="1300" dirty="0">
-                        <a:latin typeface="Calibri" charset="0"/>
-                        <a:ea typeface="Calibri" charset="0"/>
-                        <a:cs typeface="Calibri" charset="0"/>
-                      </a:endParaRPr>
-                    </a:p>
-                  </a:txBody>
-                  <a:tcPr marL="7315200" marR="7315200" marT="0" marB="0" anchor="ctr">
-                    <a:lnL w="12700" cap="flat" cmpd="sng" algn="ctr">
-                      <a:solidFill>
-                        <a:srgbClr val="DCE0F0"/>
-                      </a:solidFill>
-                      <a:prstDash val="solid"/>
-                      <a:round/>
-                      <a:headEnd type="none" w="med" len="med"/>
-                      <a:tailEnd type="none" w="med" len="med"/>
-                    </a:lnL>
-                    <a:lnR w="12700" cap="flat" cmpd="sng" algn="ctr">
-                      <a:solidFill>
-                        <a:srgbClr val="DCE0F0"/>
-                      </a:solidFill>
-                      <a:prstDash val="solid"/>
-                      <a:round/>
-                      <a:headEnd type="none" w="med" len="med"/>
-                      <a:tailEnd type="none" w="med" len="med"/>
-                    </a:lnR>
-                    <a:lnT w="12700" cap="flat" cmpd="sng" algn="ctr">
-                      <a:solidFill>
-                        <a:srgbClr val="DCE0F0"/>
-                      </a:solidFill>
-                      <a:prstDash val="solid"/>
-                      <a:round/>
-                      <a:headEnd type="none" w="med" len="med"/>
-                      <a:tailEnd type="none" w="med" len="med"/>
-                    </a:lnT>
-                    <a:lnB w="12700" cap="flat" cmpd="sng" algn="ctr">
-                      <a:solidFill>
-                        <a:srgbClr val="DCE0F0"/>
-                      </a:solidFill>
-                      <a:prstDash val="solid"/>
-                      <a:round/>
-                      <a:headEnd type="none" w="med" len="med"/>
-                      <a:tailEnd type="none" w="med" len="med"/>
-                    </a:lnB>
-                  </a:tcPr>
-                </a:tc>
-                <a:tc>
-                  <a:txBody>
-                    <a:bodyPr/>
-                    <a:lstStyle/>
-                    <a:p>
-                      <a:pPr algn="ctr" indent="0" marL="0">
-                        <a:buNone/>
-                      </a:pPr>
-                      <a:r>
-                        <a:rPr lang="en-US" sz="1300" b="1" dirty="0">
-                          <a:solidFill>
-                            <a:srgbClr val="312783"/>
-                          </a:solidFill>
-                          <a:latin typeface="Calibri" pitchFamily="34" charset="0"/>
-                          <a:ea typeface="Calibri" pitchFamily="34" charset="-122"/>
-                          <a:cs typeface="Calibri" pitchFamily="34" charset="-120"/>
-                        </a:rPr>
-                        <a:t>283</a:t>
-                      </a:r>
-                      <a:endParaRPr lang="en-US" sz="1300" dirty="0">
-                        <a:latin typeface="Calibri" charset="0"/>
-                        <a:ea typeface="Calibri" charset="0"/>
-                        <a:cs typeface="Calibri" charset="0"/>
-                      </a:endParaRPr>
-                    </a:p>
-                  </a:txBody>
-                  <a:tcPr marL="7315200" marR="7315200" marT="0" marB="0" anchor="ctr">
-                    <a:lnL w="12700" cap="flat" cmpd="sng" algn="ctr">
-                      <a:solidFill>
-                        <a:srgbClr val="DCE0F0"/>
-                      </a:solidFill>
-                      <a:prstDash val="solid"/>
-                      <a:round/>
-                      <a:headEnd type="none" w="med" len="med"/>
-                      <a:tailEnd type="none" w="med" len="med"/>
-                    </a:lnL>
-                    <a:lnR w="12700" cap="flat" cmpd="sng" algn="ctr">
-                      <a:solidFill>
-                        <a:srgbClr val="DCE0F0"/>
-                      </a:solidFill>
-                      <a:prstDash val="solid"/>
-                      <a:round/>
-                      <a:headEnd type="none" w="med" len="med"/>
-                      <a:tailEnd type="none" w="med" len="med"/>
-                    </a:lnR>
-                    <a:lnT w="12700" cap="flat" cmpd="sng" algn="ctr">
-                      <a:solidFill>
-                        <a:srgbClr val="DCE0F0"/>
-                      </a:solidFill>
-                      <a:prstDash val="solid"/>
-                      <a:round/>
-                      <a:headEnd type="none" w="med" len="med"/>
-                      <a:tailEnd type="none" w="med" len="med"/>
-                    </a:lnT>
-                    <a:lnB w="12700" cap="flat" cmpd="sng" algn="ctr">
-                      <a:solidFill>
-                        <a:srgbClr val="DCE0F0"/>
-                      </a:solidFill>
-                      <a:prstDash val="solid"/>
-                      <a:round/>
-                      <a:headEnd type="none" w="med" len="med"/>
-                      <a:tailEnd type="none" w="med" len="med"/>
-                    </a:lnB>
-                  </a:tcPr>
-                </a:tc>
-                <a:tc>
-                  <a:txBody>
-                    <a:bodyPr/>
-                    <a:lstStyle/>
-                    <a:p>
-                      <a:pPr algn="ctr" indent="0" marL="0">
-                        <a:buNone/>
-                      </a:pPr>
-                      <a:r>
-                        <a:rPr lang="en-US" sz="1300" b="1" dirty="0">
-                          <a:solidFill>
-                            <a:srgbClr val="7DB928"/>
-                          </a:solidFill>
-                          <a:latin typeface="Calibri" pitchFamily="34" charset="0"/>
-                          <a:ea typeface="Calibri" pitchFamily="34" charset="-122"/>
-                          <a:cs typeface="Calibri" pitchFamily="34" charset="-120"/>
-                        </a:rPr>
-                        <a:t>−82</a:t>
-                      </a:r>
-                      <a:endParaRPr lang="en-US" sz="1300" dirty="0">
-                        <a:latin typeface="Calibri" charset="0"/>
-                        <a:ea typeface="Calibri" charset="0"/>
-                        <a:cs typeface="Calibri" charset="0"/>
-                      </a:endParaRPr>
-                    </a:p>
-                  </a:txBody>
-                  <a:tcPr marL="7315200" marR="7315200" marT="0" marB="0" anchor="ctr">
-                    <a:lnL w="12700" cap="flat" cmpd="sng" algn="ctr">
-                      <a:solidFill>
-                        <a:srgbClr val="DCE0F0"/>
-                      </a:solidFill>
-                      <a:prstDash val="solid"/>
-                      <a:round/>
-                      <a:headEnd type="none" w="med" len="med"/>
-                      <a:tailEnd type="none" w="med" len="med"/>
-                    </a:lnL>
-                    <a:lnR w="12700" cap="flat" cmpd="sng" algn="ctr">
-                      <a:solidFill>
-                        <a:srgbClr val="DCE0F0"/>
-                      </a:solidFill>
-                      <a:prstDash val="solid"/>
-                      <a:round/>
-                      <a:headEnd type="none" w="med" len="med"/>
-                      <a:tailEnd type="none" w="med" len="med"/>
-                    </a:lnR>
-                    <a:lnT w="12700" cap="flat" cmpd="sng" algn="ctr">
-                      <a:solidFill>
-                        <a:srgbClr val="DCE0F0"/>
-                      </a:solidFill>
-                      <a:prstDash val="solid"/>
-                      <a:round/>
-                      <a:headEnd type="none" w="med" len="med"/>
-                      <a:tailEnd type="none" w="med" len="med"/>
-                    </a:lnT>
-                    <a:lnB w="12700" cap="flat" cmpd="sng" algn="ctr">
-                      <a:solidFill>
-                        <a:srgbClr val="DCE0F0"/>
-                      </a:solidFill>
-                      <a:prstDash val="solid"/>
-                      <a:round/>
-                      <a:headEnd type="none" w="med" len="med"/>
-                      <a:tailEnd type="none" w="med" len="med"/>
-                    </a:lnB>
-                  </a:tcPr>
-                </a:tc>
-              </a:tr>
-              <a:tr h="384048">
-                <a:tc>
-                  <a:txBody>
-                    <a:bodyPr/>
-                    <a:lstStyle/>
-                    <a:p>
-                      <a:pPr algn="l" indent="0" marL="0">
-                        <a:buNone/>
-                      </a:pPr>
-                      <a:r>
-                        <a:rPr lang="en-US" sz="1300" b="1" dirty="0">
-                          <a:solidFill>
-                            <a:srgbClr val="312783"/>
-                          </a:solidFill>
-                          <a:latin typeface="Calibri" pitchFamily="34" charset="0"/>
-                          <a:ea typeface="Calibri" pitchFamily="34" charset="-122"/>
-                          <a:cs typeface="Calibri" pitchFamily="34" charset="-120"/>
-                        </a:rPr>
-                        <a:t>Всего</a:t>
-                      </a:r>
-                      <a:endParaRPr lang="en-US" sz="1300" dirty="0">
-                        <a:latin typeface="Calibri" charset="0"/>
-                        <a:ea typeface="Calibri" charset="0"/>
-                        <a:cs typeface="Calibri" charset="0"/>
-                      </a:endParaRPr>
-                    </a:p>
-                  </a:txBody>
-                  <a:tcPr marL="7315200" marR="7315200" marT="0" marB="0" anchor="ctr">
-                    <a:lnL w="12700" cap="flat" cmpd="sng" algn="ctr">
-                      <a:solidFill>
-                        <a:srgbClr val="DCE0F0"/>
-                      </a:solidFill>
-                      <a:prstDash val="solid"/>
-                      <a:round/>
-                      <a:headEnd type="none" w="med" len="med"/>
-                      <a:tailEnd type="none" w="med" len="med"/>
-                    </a:lnL>
-                    <a:lnR w="12700" cap="flat" cmpd="sng" algn="ctr">
-                      <a:solidFill>
-                        <a:srgbClr val="DCE0F0"/>
-                      </a:solidFill>
-                      <a:prstDash val="solid"/>
-                      <a:round/>
-                      <a:headEnd type="none" w="med" len="med"/>
-                      <a:tailEnd type="none" w="med" len="med"/>
-                    </a:lnR>
-                    <a:lnT w="12700" cap="flat" cmpd="sng" algn="ctr">
-                      <a:solidFill>
-                        <a:srgbClr val="DCE0F0"/>
-                      </a:solidFill>
-                      <a:prstDash val="solid"/>
-                      <a:round/>
-                      <a:headEnd type="none" w="med" len="med"/>
-                      <a:tailEnd type="none" w="med" len="med"/>
-                    </a:lnT>
-                    <a:lnB w="12700" cap="flat" cmpd="sng" algn="ctr">
-                      <a:solidFill>
-                        <a:srgbClr val="DCE0F0"/>
-                      </a:solidFill>
-                      <a:prstDash val="solid"/>
-                      <a:round/>
-                      <a:headEnd type="none" w="med" len="med"/>
-                      <a:tailEnd type="none" w="med" len="med"/>
-                    </a:lnB>
-                    <a:solidFill>
-                      <a:srgbClr val="E9F5FD"/>
-                    </a:solidFill>
-                  </a:tcPr>
-                </a:tc>
-                <a:tc>
-                  <a:txBody>
-                    <a:bodyPr/>
-                    <a:lstStyle/>
-                    <a:p>
-                      <a:pPr algn="ctr" indent="0" marL="0">
-                        <a:buNone/>
-                      </a:pPr>
-                      <a:r>
-                        <a:rPr lang="en-US" sz="1300" b="1" dirty="0">
-                          <a:solidFill>
-                            <a:srgbClr val="45415F"/>
-                          </a:solidFill>
-                          <a:latin typeface="Calibri" pitchFamily="34" charset="0"/>
-                          <a:ea typeface="Calibri" pitchFamily="34" charset="-122"/>
-                          <a:cs typeface="Calibri" pitchFamily="34" charset="-120"/>
-                        </a:rPr>
-                        <a:t>977</a:t>
-                      </a:r>
-                      <a:endParaRPr lang="en-US" sz="1300" dirty="0">
-                        <a:latin typeface="Calibri" charset="0"/>
-                        <a:ea typeface="Calibri" charset="0"/>
-                        <a:cs typeface="Calibri" charset="0"/>
-                      </a:endParaRPr>
-                    </a:p>
-                  </a:txBody>
-                  <a:tcPr marL="7315200" marR="7315200" marT="0" marB="0" anchor="ctr">
-                    <a:lnL w="12700" cap="flat" cmpd="sng" algn="ctr">
-                      <a:solidFill>
-                        <a:srgbClr val="DCE0F0"/>
-                      </a:solidFill>
-                      <a:prstDash val="solid"/>
-                      <a:round/>
-                      <a:headEnd type="none" w="med" len="med"/>
-                      <a:tailEnd type="none" w="med" len="med"/>
-                    </a:lnL>
-                    <a:lnR w="12700" cap="flat" cmpd="sng" algn="ctr">
-                      <a:solidFill>
-                        <a:srgbClr val="DCE0F0"/>
-                      </a:solidFill>
-                      <a:prstDash val="solid"/>
-                      <a:round/>
-                      <a:headEnd type="none" w="med" len="med"/>
-                      <a:tailEnd type="none" w="med" len="med"/>
-                    </a:lnR>
-                    <a:lnT w="12700" cap="flat" cmpd="sng" algn="ctr">
-                      <a:solidFill>
-                        <a:srgbClr val="DCE0F0"/>
-                      </a:solidFill>
-                      <a:prstDash val="solid"/>
-                      <a:round/>
-                      <a:headEnd type="none" w="med" len="med"/>
-                      <a:tailEnd type="none" w="med" len="med"/>
-                    </a:lnT>
-                    <a:lnB w="12700" cap="flat" cmpd="sng" algn="ctr">
-                      <a:solidFill>
-                        <a:srgbClr val="DCE0F0"/>
-                      </a:solidFill>
-                      <a:prstDash val="solid"/>
-                      <a:round/>
-                      <a:headEnd type="none" w="med" len="med"/>
-                      <a:tailEnd type="none" w="med" len="med"/>
-                    </a:lnB>
-                    <a:solidFill>
-                      <a:srgbClr val="E9F5FD"/>
-                    </a:solidFill>
-                  </a:tcPr>
-                </a:tc>
-                <a:tc>
-                  <a:txBody>
-                    <a:bodyPr/>
-                    <a:lstStyle/>
-                    <a:p>
-                      <a:pPr algn="ctr" indent="0" marL="0">
-                        <a:buNone/>
-                      </a:pPr>
-                      <a:r>
-                        <a:rPr lang="en-US" sz="1300" b="1" dirty="0">
-                          <a:solidFill>
-                            <a:srgbClr val="312783"/>
-                          </a:solidFill>
-                          <a:latin typeface="Calibri" pitchFamily="34" charset="0"/>
-                          <a:ea typeface="Calibri" pitchFamily="34" charset="-122"/>
-                          <a:cs typeface="Calibri" pitchFamily="34" charset="-120"/>
-                        </a:rPr>
-                        <a:t>548</a:t>
-                      </a:r>
-                      <a:endParaRPr lang="en-US" sz="1300" dirty="0">
-                        <a:latin typeface="Calibri" charset="0"/>
-                        <a:ea typeface="Calibri" charset="0"/>
-                        <a:cs typeface="Calibri" charset="0"/>
-                      </a:endParaRPr>
-                    </a:p>
-                  </a:txBody>
-                  <a:tcPr marL="7315200" marR="7315200" marT="0" marB="0" anchor="ctr">
-                    <a:lnL w="12700" cap="flat" cmpd="sng" algn="ctr">
-                      <a:solidFill>
-                        <a:srgbClr val="DCE0F0"/>
-                      </a:solidFill>
-                      <a:prstDash val="solid"/>
-                      <a:round/>
-                      <a:headEnd type="none" w="med" len="med"/>
-                      <a:tailEnd type="none" w="med" len="med"/>
-                    </a:lnL>
-                    <a:lnR w="12700" cap="flat" cmpd="sng" algn="ctr">
-                      <a:solidFill>
-                        <a:srgbClr val="DCE0F0"/>
-                      </a:solidFill>
-                      <a:prstDash val="solid"/>
-                      <a:round/>
-                      <a:headEnd type="none" w="med" len="med"/>
-                      <a:tailEnd type="none" w="med" len="med"/>
-                    </a:lnR>
-                    <a:lnT w="12700" cap="flat" cmpd="sng" algn="ctr">
-                      <a:solidFill>
-                        <a:srgbClr val="DCE0F0"/>
-                      </a:solidFill>
-                      <a:prstDash val="solid"/>
-                      <a:round/>
-                      <a:headEnd type="none" w="med" len="med"/>
-                      <a:tailEnd type="none" w="med" len="med"/>
-                    </a:lnT>
-                    <a:lnB w="12700" cap="flat" cmpd="sng" algn="ctr">
-                      <a:solidFill>
-                        <a:srgbClr val="DCE0F0"/>
-                      </a:solidFill>
-                      <a:prstDash val="solid"/>
-                      <a:round/>
-                      <a:headEnd type="none" w="med" len="med"/>
-                      <a:tailEnd type="none" w="med" len="med"/>
-                    </a:lnB>
-                    <a:solidFill>
-                      <a:srgbClr val="E9F5FD"/>
-                    </a:solidFill>
-                  </a:tcPr>
-                </a:tc>
-                <a:tc>
-                  <a:txBody>
-                    <a:bodyPr/>
-                    <a:lstStyle/>
-                    <a:p>
-                      <a:pPr algn="ctr" indent="0" marL="0">
-                        <a:buNone/>
-                      </a:pPr>
-                      <a:r>
-                        <a:rPr lang="en-US" sz="1300" b="1" dirty="0">
-                          <a:solidFill>
-                            <a:srgbClr val="7DB928"/>
-                          </a:solidFill>
-                          <a:latin typeface="Calibri" pitchFamily="34" charset="0"/>
-                          <a:ea typeface="Calibri" pitchFamily="34" charset="-122"/>
-                          <a:cs typeface="Calibri" pitchFamily="34" charset="-120"/>
-                        </a:rPr>
-                        <a:t>−429</a:t>
-                      </a:r>
-                      <a:endParaRPr lang="en-US" sz="1300" dirty="0">
-                        <a:latin typeface="Calibri" charset="0"/>
-                        <a:ea typeface="Calibri" charset="0"/>
-                        <a:cs typeface="Calibri" charset="0"/>
-                      </a:endParaRPr>
-                    </a:p>
-                  </a:txBody>
-                  <a:tcPr marL="7315200" marR="7315200" marT="0" marB="0" anchor="ctr">
-                    <a:lnL w="12700" cap="flat" cmpd="sng" algn="ctr">
-                      <a:solidFill>
-                        <a:srgbClr val="DCE0F0"/>
-                      </a:solidFill>
-                      <a:prstDash val="solid"/>
-                      <a:round/>
-                      <a:headEnd type="none" w="med" len="med"/>
-                      <a:tailEnd type="none" w="med" len="med"/>
-                    </a:lnL>
-                    <a:lnR w="12700" cap="flat" cmpd="sng" algn="ctr">
-                      <a:solidFill>
-                        <a:srgbClr val="DCE0F0"/>
-                      </a:solidFill>
-                      <a:prstDash val="solid"/>
-                      <a:round/>
-                      <a:headEnd type="none" w="med" len="med"/>
-                      <a:tailEnd type="none" w="med" len="med"/>
-                    </a:lnR>
-                    <a:lnT w="12700" cap="flat" cmpd="sng" algn="ctr">
-                      <a:solidFill>
-                        <a:srgbClr val="DCE0F0"/>
-                      </a:solidFill>
-                      <a:prstDash val="solid"/>
-                      <a:round/>
-                      <a:headEnd type="none" w="med" len="med"/>
-                      <a:tailEnd type="none" w="med" len="med"/>
-                    </a:lnT>
-                    <a:lnB w="12700" cap="flat" cmpd="sng" algn="ctr">
-                      <a:solidFill>
-                        <a:srgbClr val="DCE0F0"/>
-                      </a:solidFill>
-                      <a:prstDash val="solid"/>
-                      <a:round/>
-                      <a:headEnd type="none" w="med" len="med"/>
-                      <a:tailEnd type="none" w="med" len="med"/>
-                    </a:lnB>
-                    <a:solidFill>
-                      <a:srgbClr val="E9F5FD"/>
-                    </a:solidFill>
-                  </a:tcPr>
-                </a:tc>
-              </a:tr>
-            </a:tbl>
-          </a:graphicData>
-        </a:graphic>
-      </p:graphicFrame>
-      <p:sp>
-        <p:nvSpPr>
-          <p:cNvPr id="7" name="Shape 4"/>
+            <a:endParaRPr lang="en-US" sz="2800" dirty="0"/>
+          </a:p>
+        </p:txBody>
+      </p:sp>
+      <p:sp>
+        <p:nvSpPr>
+          <p:cNvPr id="6" name="Shape 4"/>
+          <p:cNvSpPr/>
+          <p:nvPr/>
+        </p:nvSpPr>
+        <p:spPr>
+          <a:xfrm>
+            <a:off x="502920" y="1481328"/>
+            <a:ext cx="6035040" cy="420624"/>
+          </a:xfrm>
+          <a:prstGeom prst="rect">
+            <a:avLst/>
+          </a:prstGeom>
+          <a:solidFill>
+            <a:srgbClr val="312783"/>
+          </a:solidFill>
+          <a:ln/>
+        </p:spPr>
+      </p:sp>
+      <p:sp>
+        <p:nvSpPr>
+          <p:cNvPr id="7" name="Text 5"/>
+          <p:cNvSpPr/>
+          <p:nvPr/>
+        </p:nvSpPr>
+        <p:spPr>
+          <a:xfrm>
+            <a:off x="667512" y="1481328"/>
+            <a:ext cx="2029968" cy="420624"/>
+          </a:xfrm>
+          <a:prstGeom prst="rect">
+            <a:avLst/>
+          </a:prstGeom>
+          <a:noFill/>
+          <a:ln/>
+        </p:spPr>
+        <p:txBody>
+          <a:bodyPr wrap="square" lIns="0" tIns="0" rIns="0" bIns="0" rtlCol="0" anchor="ctr"/>
+          <a:lstStyle/>
+          <a:p>
+            <a:pPr algn="l" indent="0" marL="0">
+              <a:buNone/>
+            </a:pPr>
+            <a:r>
+              <a:rPr lang="en-US" sz="1250" b="1" dirty="0">
+                <a:solidFill>
+                  <a:srgbClr val="FFFFFF"/>
+                </a:solidFill>
+                <a:latin typeface="Calibri" pitchFamily="34" charset="0"/>
+                <a:ea typeface="Calibri" pitchFamily="34" charset="-122"/>
+                <a:cs typeface="Calibri" pitchFamily="34" charset="-120"/>
+              </a:rPr>
+              <a:t>Администратор</a:t>
+            </a:r>
+            <a:endParaRPr lang="en-US" sz="1250" dirty="0"/>
+          </a:p>
+        </p:txBody>
+      </p:sp>
+      <p:sp>
+        <p:nvSpPr>
+          <p:cNvPr id="8" name="Text 6"/>
+          <p:cNvSpPr/>
+          <p:nvPr/>
+        </p:nvSpPr>
+        <p:spPr>
+          <a:xfrm>
+            <a:off x="2697480" y="1481328"/>
+            <a:ext cx="1188720" cy="420624"/>
+          </a:xfrm>
+          <a:prstGeom prst="rect">
+            <a:avLst/>
+          </a:prstGeom>
+          <a:noFill/>
+          <a:ln/>
+        </p:spPr>
+        <p:txBody>
+          <a:bodyPr wrap="square" lIns="0" tIns="0" rIns="0" bIns="0" rtlCol="0" anchor="ctr"/>
+          <a:lstStyle/>
+          <a:p>
+            <a:pPr algn="ctr" indent="0" marL="0">
+              <a:buNone/>
+            </a:pPr>
+            <a:r>
+              <a:rPr lang="en-US" sz="1250" b="1" dirty="0">
+                <a:solidFill>
+                  <a:srgbClr val="FFFFFF"/>
+                </a:solidFill>
+                <a:latin typeface="Calibri" pitchFamily="34" charset="0"/>
+                <a:ea typeface="Calibri" pitchFamily="34" charset="-122"/>
+                <a:cs typeface="Calibri" pitchFamily="34" charset="-120"/>
+              </a:rPr>
+              <a:t>Было</a:t>
+            </a:r>
+            <a:endParaRPr lang="en-US" sz="1250" dirty="0"/>
+          </a:p>
+        </p:txBody>
+      </p:sp>
+      <p:sp>
+        <p:nvSpPr>
+          <p:cNvPr id="9" name="Text 7"/>
+          <p:cNvSpPr/>
+          <p:nvPr/>
+        </p:nvSpPr>
+        <p:spPr>
+          <a:xfrm>
+            <a:off x="3886200" y="1481328"/>
+            <a:ext cx="1188720" cy="420624"/>
+          </a:xfrm>
+          <a:prstGeom prst="rect">
+            <a:avLst/>
+          </a:prstGeom>
+          <a:noFill/>
+          <a:ln/>
+        </p:spPr>
+        <p:txBody>
+          <a:bodyPr wrap="square" lIns="0" tIns="0" rIns="0" bIns="0" rtlCol="0" anchor="ctr"/>
+          <a:lstStyle/>
+          <a:p>
+            <a:pPr algn="ctr" indent="0" marL="0">
+              <a:buNone/>
+            </a:pPr>
+            <a:r>
+              <a:rPr lang="en-US" sz="1250" b="1" dirty="0">
+                <a:solidFill>
+                  <a:srgbClr val="FFFFFF"/>
+                </a:solidFill>
+                <a:latin typeface="Calibri" pitchFamily="34" charset="0"/>
+                <a:ea typeface="Calibri" pitchFamily="34" charset="-122"/>
+                <a:cs typeface="Calibri" pitchFamily="34" charset="-120"/>
+              </a:rPr>
+              <a:t>Стало</a:t>
+            </a:r>
+            <a:endParaRPr lang="en-US" sz="1250" dirty="0"/>
+          </a:p>
+        </p:txBody>
+      </p:sp>
+      <p:sp>
+        <p:nvSpPr>
+          <p:cNvPr id="10" name="Text 8"/>
+          <p:cNvSpPr/>
+          <p:nvPr/>
+        </p:nvSpPr>
+        <p:spPr>
+          <a:xfrm>
+            <a:off x="5074920" y="1481328"/>
+            <a:ext cx="1463040" cy="420624"/>
+          </a:xfrm>
+          <a:prstGeom prst="rect">
+            <a:avLst/>
+          </a:prstGeom>
+          <a:noFill/>
+          <a:ln/>
+        </p:spPr>
+        <p:txBody>
+          <a:bodyPr wrap="square" lIns="0" tIns="0" rIns="0" bIns="0" rtlCol="0" anchor="ctr"/>
+          <a:lstStyle/>
+          <a:p>
+            <a:pPr algn="ctr" indent="0" marL="0">
+              <a:buNone/>
+            </a:pPr>
+            <a:r>
+              <a:rPr lang="en-US" sz="1250" b="1" dirty="0">
+                <a:solidFill>
+                  <a:srgbClr val="FFFFFF"/>
+                </a:solidFill>
+                <a:latin typeface="Calibri" pitchFamily="34" charset="0"/>
+                <a:ea typeface="Calibri" pitchFamily="34" charset="-122"/>
+                <a:cs typeface="Calibri" pitchFamily="34" charset="-120"/>
+              </a:rPr>
+              <a:t>Изменение</a:t>
+            </a:r>
+            <a:endParaRPr lang="en-US" sz="1250" dirty="0"/>
+          </a:p>
+        </p:txBody>
+      </p:sp>
+      <p:sp>
+        <p:nvSpPr>
+          <p:cNvPr id="11" name="Shape 9"/>
+          <p:cNvSpPr/>
+          <p:nvPr/>
+        </p:nvSpPr>
+        <p:spPr>
+          <a:xfrm>
+            <a:off x="502920" y="1901952"/>
+            <a:ext cx="6035040" cy="402336"/>
+          </a:xfrm>
+          <a:prstGeom prst="rect">
+            <a:avLst/>
+          </a:prstGeom>
+          <a:solidFill>
+            <a:srgbClr val="FFFFFF"/>
+          </a:solidFill>
+          <a:ln w="12700">
+            <a:solidFill>
+              <a:srgbClr val="DCE0F0"/>
+            </a:solidFill>
+            <a:prstDash val="solid"/>
+          </a:ln>
+        </p:spPr>
+      </p:sp>
+      <p:sp>
+        <p:nvSpPr>
+          <p:cNvPr id="12" name="Text 10"/>
+          <p:cNvSpPr/>
+          <p:nvPr/>
+        </p:nvSpPr>
+        <p:spPr>
+          <a:xfrm>
+            <a:off x="667512" y="1901952"/>
+            <a:ext cx="2029968" cy="402336"/>
+          </a:xfrm>
+          <a:prstGeom prst="rect">
+            <a:avLst/>
+          </a:prstGeom>
+          <a:noFill/>
+          <a:ln/>
+        </p:spPr>
+        <p:txBody>
+          <a:bodyPr wrap="square" lIns="0" tIns="0" rIns="0" bIns="0" rtlCol="0" anchor="ctr"/>
+          <a:lstStyle/>
+          <a:p>
+            <a:pPr indent="0" marL="0">
+              <a:buNone/>
+            </a:pPr>
+            <a:r>
+              <a:rPr lang="en-US" sz="1300" b="1" dirty="0">
+                <a:solidFill>
+                  <a:srgbClr val="241C5C"/>
+                </a:solidFill>
+                <a:latin typeface="Calibri" pitchFamily="34" charset="0"/>
+                <a:ea typeface="Calibri" pitchFamily="34" charset="-122"/>
+                <a:cs typeface="Calibri" pitchFamily="34" charset="-120"/>
+              </a:rPr>
+              <a:t>Ирина</a:t>
+            </a:r>
+            <a:endParaRPr lang="en-US" sz="1300" dirty="0"/>
+          </a:p>
+        </p:txBody>
+      </p:sp>
+      <p:sp>
+        <p:nvSpPr>
+          <p:cNvPr id="13" name="Text 11"/>
+          <p:cNvSpPr/>
+          <p:nvPr/>
+        </p:nvSpPr>
+        <p:spPr>
+          <a:xfrm>
+            <a:off x="2697480" y="1901952"/>
+            <a:ext cx="1188720" cy="402336"/>
+          </a:xfrm>
+          <a:prstGeom prst="rect">
+            <a:avLst/>
+          </a:prstGeom>
+          <a:noFill/>
+          <a:ln/>
+        </p:spPr>
+        <p:txBody>
+          <a:bodyPr wrap="square" lIns="0" tIns="0" rIns="0" bIns="0" rtlCol="0" anchor="ctr"/>
+          <a:lstStyle/>
+          <a:p>
+            <a:pPr algn="ctr" indent="0" marL="0">
+              <a:buNone/>
+            </a:pPr>
+            <a:r>
+              <a:rPr lang="en-US" sz="1300" dirty="0">
+                <a:solidFill>
+                  <a:srgbClr val="7B7796"/>
+                </a:solidFill>
+                <a:latin typeface="Arial" pitchFamily="34" charset="0"/>
+                <a:ea typeface="Arial" pitchFamily="34" charset="-122"/>
+                <a:cs typeface="Arial" pitchFamily="34" charset="-120"/>
+              </a:rPr>
+              <a:t>208</a:t>
+            </a:r>
+            <a:endParaRPr lang="en-US" sz="1300" dirty="0"/>
+          </a:p>
+        </p:txBody>
+      </p:sp>
+      <p:sp>
+        <p:nvSpPr>
+          <p:cNvPr id="14" name="Text 12"/>
+          <p:cNvSpPr/>
+          <p:nvPr/>
+        </p:nvSpPr>
+        <p:spPr>
+          <a:xfrm>
+            <a:off x="3886200" y="1901952"/>
+            <a:ext cx="1188720" cy="402336"/>
+          </a:xfrm>
+          <a:prstGeom prst="rect">
+            <a:avLst/>
+          </a:prstGeom>
+          <a:noFill/>
+          <a:ln/>
+        </p:spPr>
+        <p:txBody>
+          <a:bodyPr wrap="square" lIns="0" tIns="0" rIns="0" bIns="0" rtlCol="0" anchor="ctr"/>
+          <a:lstStyle/>
+          <a:p>
+            <a:pPr algn="ctr" indent="0" marL="0">
+              <a:buNone/>
+            </a:pPr>
+            <a:r>
+              <a:rPr lang="en-US" sz="1300" b="1" dirty="0">
+                <a:solidFill>
+                  <a:srgbClr val="312783"/>
+                </a:solidFill>
+                <a:latin typeface="Arial" pitchFamily="34" charset="0"/>
+                <a:ea typeface="Arial" pitchFamily="34" charset="-122"/>
+                <a:cs typeface="Arial" pitchFamily="34" charset="-120"/>
+              </a:rPr>
+              <a:t>73</a:t>
+            </a:r>
+            <a:endParaRPr lang="en-US" sz="1300" dirty="0"/>
+          </a:p>
+        </p:txBody>
+      </p:sp>
+      <p:sp>
+        <p:nvSpPr>
+          <p:cNvPr id="15" name="Text 13"/>
+          <p:cNvSpPr/>
+          <p:nvPr/>
+        </p:nvSpPr>
+        <p:spPr>
+          <a:xfrm>
+            <a:off x="5074920" y="1901952"/>
+            <a:ext cx="1463040" cy="402336"/>
+          </a:xfrm>
+          <a:prstGeom prst="rect">
+            <a:avLst/>
+          </a:prstGeom>
+          <a:noFill/>
+          <a:ln/>
+        </p:spPr>
+        <p:txBody>
+          <a:bodyPr wrap="square" lIns="0" tIns="0" rIns="0" bIns="0" rtlCol="0" anchor="ctr"/>
+          <a:lstStyle/>
+          <a:p>
+            <a:pPr algn="ctr" indent="0" marL="0">
+              <a:buNone/>
+            </a:pPr>
+            <a:r>
+              <a:rPr lang="en-US" sz="1300" b="1" dirty="0">
+                <a:solidFill>
+                  <a:srgbClr val="7DB928"/>
+                </a:solidFill>
+                <a:latin typeface="Arial" pitchFamily="34" charset="0"/>
+                <a:ea typeface="Arial" pitchFamily="34" charset="-122"/>
+                <a:cs typeface="Arial" pitchFamily="34" charset="-120"/>
+              </a:rPr>
+              <a:t>−135</a:t>
+            </a:r>
+            <a:endParaRPr lang="en-US" sz="1300" dirty="0"/>
+          </a:p>
+        </p:txBody>
+      </p:sp>
+      <p:sp>
+        <p:nvSpPr>
+          <p:cNvPr id="16" name="Shape 14"/>
+          <p:cNvSpPr/>
+          <p:nvPr/>
+        </p:nvSpPr>
+        <p:spPr>
+          <a:xfrm>
+            <a:off x="502920" y="2304288"/>
+            <a:ext cx="6035040" cy="402336"/>
+          </a:xfrm>
+          <a:prstGeom prst="rect">
+            <a:avLst/>
+          </a:prstGeom>
+          <a:solidFill>
+            <a:srgbClr val="FFFFFF"/>
+          </a:solidFill>
+          <a:ln w="12700">
+            <a:solidFill>
+              <a:srgbClr val="DCE0F0"/>
+            </a:solidFill>
+            <a:prstDash val="solid"/>
+          </a:ln>
+        </p:spPr>
+      </p:sp>
+      <p:sp>
+        <p:nvSpPr>
+          <p:cNvPr id="17" name="Text 15"/>
+          <p:cNvSpPr/>
+          <p:nvPr/>
+        </p:nvSpPr>
+        <p:spPr>
+          <a:xfrm>
+            <a:off x="667512" y="2304288"/>
+            <a:ext cx="2029968" cy="402336"/>
+          </a:xfrm>
+          <a:prstGeom prst="rect">
+            <a:avLst/>
+          </a:prstGeom>
+          <a:noFill/>
+          <a:ln/>
+        </p:spPr>
+        <p:txBody>
+          <a:bodyPr wrap="square" lIns="0" tIns="0" rIns="0" bIns="0" rtlCol="0" anchor="ctr"/>
+          <a:lstStyle/>
+          <a:p>
+            <a:pPr indent="0" marL="0">
+              <a:buNone/>
+            </a:pPr>
+            <a:r>
+              <a:rPr lang="en-US" sz="1300" b="1" dirty="0">
+                <a:solidFill>
+                  <a:srgbClr val="241C5C"/>
+                </a:solidFill>
+                <a:latin typeface="Calibri" pitchFamily="34" charset="0"/>
+                <a:ea typeface="Calibri" pitchFamily="34" charset="-122"/>
+                <a:cs typeface="Calibri" pitchFamily="34" charset="-120"/>
+              </a:rPr>
+              <a:t>Анна</a:t>
+            </a:r>
+            <a:endParaRPr lang="en-US" sz="1300" dirty="0"/>
+          </a:p>
+        </p:txBody>
+      </p:sp>
+      <p:sp>
+        <p:nvSpPr>
+          <p:cNvPr id="18" name="Text 16"/>
+          <p:cNvSpPr/>
+          <p:nvPr/>
+        </p:nvSpPr>
+        <p:spPr>
+          <a:xfrm>
+            <a:off x="2697480" y="2304288"/>
+            <a:ext cx="1188720" cy="402336"/>
+          </a:xfrm>
+          <a:prstGeom prst="rect">
+            <a:avLst/>
+          </a:prstGeom>
+          <a:noFill/>
+          <a:ln/>
+        </p:spPr>
+        <p:txBody>
+          <a:bodyPr wrap="square" lIns="0" tIns="0" rIns="0" bIns="0" rtlCol="0" anchor="ctr"/>
+          <a:lstStyle/>
+          <a:p>
+            <a:pPr algn="ctr" indent="0" marL="0">
+              <a:buNone/>
+            </a:pPr>
+            <a:r>
+              <a:rPr lang="en-US" sz="1300" dirty="0">
+                <a:solidFill>
+                  <a:srgbClr val="7B7796"/>
+                </a:solidFill>
+                <a:latin typeface="Arial" pitchFamily="34" charset="0"/>
+                <a:ea typeface="Arial" pitchFamily="34" charset="-122"/>
+                <a:cs typeface="Arial" pitchFamily="34" charset="-120"/>
+              </a:rPr>
+              <a:t>253</a:t>
+            </a:r>
+            <a:endParaRPr lang="en-US" sz="1300" dirty="0"/>
+          </a:p>
+        </p:txBody>
+      </p:sp>
+      <p:sp>
+        <p:nvSpPr>
+          <p:cNvPr id="19" name="Text 17"/>
+          <p:cNvSpPr/>
+          <p:nvPr/>
+        </p:nvSpPr>
+        <p:spPr>
+          <a:xfrm>
+            <a:off x="3886200" y="2304288"/>
+            <a:ext cx="1188720" cy="402336"/>
+          </a:xfrm>
+          <a:prstGeom prst="rect">
+            <a:avLst/>
+          </a:prstGeom>
+          <a:noFill/>
+          <a:ln/>
+        </p:spPr>
+        <p:txBody>
+          <a:bodyPr wrap="square" lIns="0" tIns="0" rIns="0" bIns="0" rtlCol="0" anchor="ctr"/>
+          <a:lstStyle/>
+          <a:p>
+            <a:pPr algn="ctr" indent="0" marL="0">
+              <a:buNone/>
+            </a:pPr>
+            <a:r>
+              <a:rPr lang="en-US" sz="1300" b="1" dirty="0">
+                <a:solidFill>
+                  <a:srgbClr val="312783"/>
+                </a:solidFill>
+                <a:latin typeface="Arial" pitchFamily="34" charset="0"/>
+                <a:ea typeface="Arial" pitchFamily="34" charset="-122"/>
+                <a:cs typeface="Arial" pitchFamily="34" charset="-120"/>
+              </a:rPr>
+              <a:t>108</a:t>
+            </a:r>
+            <a:endParaRPr lang="en-US" sz="1300" dirty="0"/>
+          </a:p>
+        </p:txBody>
+      </p:sp>
+      <p:sp>
+        <p:nvSpPr>
+          <p:cNvPr id="20" name="Text 18"/>
+          <p:cNvSpPr/>
+          <p:nvPr/>
+        </p:nvSpPr>
+        <p:spPr>
+          <a:xfrm>
+            <a:off x="5074920" y="2304288"/>
+            <a:ext cx="1463040" cy="402336"/>
+          </a:xfrm>
+          <a:prstGeom prst="rect">
+            <a:avLst/>
+          </a:prstGeom>
+          <a:noFill/>
+          <a:ln/>
+        </p:spPr>
+        <p:txBody>
+          <a:bodyPr wrap="square" lIns="0" tIns="0" rIns="0" bIns="0" rtlCol="0" anchor="ctr"/>
+          <a:lstStyle/>
+          <a:p>
+            <a:pPr algn="ctr" indent="0" marL="0">
+              <a:buNone/>
+            </a:pPr>
+            <a:r>
+              <a:rPr lang="en-US" sz="1300" b="1" dirty="0">
+                <a:solidFill>
+                  <a:srgbClr val="7DB928"/>
+                </a:solidFill>
+                <a:latin typeface="Arial" pitchFamily="34" charset="0"/>
+                <a:ea typeface="Arial" pitchFamily="34" charset="-122"/>
+                <a:cs typeface="Arial" pitchFamily="34" charset="-120"/>
+              </a:rPr>
+              <a:t>−145</a:t>
+            </a:r>
+            <a:endParaRPr lang="en-US" sz="1300" dirty="0"/>
+          </a:p>
+        </p:txBody>
+      </p:sp>
+      <p:sp>
+        <p:nvSpPr>
+          <p:cNvPr id="21" name="Shape 19"/>
+          <p:cNvSpPr/>
+          <p:nvPr/>
+        </p:nvSpPr>
+        <p:spPr>
+          <a:xfrm>
+            <a:off x="502920" y="2706624"/>
+            <a:ext cx="6035040" cy="402336"/>
+          </a:xfrm>
+          <a:prstGeom prst="rect">
+            <a:avLst/>
+          </a:prstGeom>
+          <a:solidFill>
+            <a:srgbClr val="FFFFFF"/>
+          </a:solidFill>
+          <a:ln w="12700">
+            <a:solidFill>
+              <a:srgbClr val="DCE0F0"/>
+            </a:solidFill>
+            <a:prstDash val="solid"/>
+          </a:ln>
+        </p:spPr>
+      </p:sp>
+      <p:sp>
+        <p:nvSpPr>
+          <p:cNvPr id="22" name="Text 20"/>
+          <p:cNvSpPr/>
+          <p:nvPr/>
+        </p:nvSpPr>
+        <p:spPr>
+          <a:xfrm>
+            <a:off x="667512" y="2706624"/>
+            <a:ext cx="2029968" cy="402336"/>
+          </a:xfrm>
+          <a:prstGeom prst="rect">
+            <a:avLst/>
+          </a:prstGeom>
+          <a:noFill/>
+          <a:ln/>
+        </p:spPr>
+        <p:txBody>
+          <a:bodyPr wrap="square" lIns="0" tIns="0" rIns="0" bIns="0" rtlCol="0" anchor="ctr"/>
+          <a:lstStyle/>
+          <a:p>
+            <a:pPr indent="0" marL="0">
+              <a:buNone/>
+            </a:pPr>
+            <a:r>
+              <a:rPr lang="en-US" sz="1300" b="1" dirty="0">
+                <a:solidFill>
+                  <a:srgbClr val="241C5C"/>
+                </a:solidFill>
+                <a:latin typeface="Calibri" pitchFamily="34" charset="0"/>
+                <a:ea typeface="Calibri" pitchFamily="34" charset="-122"/>
+                <a:cs typeface="Calibri" pitchFamily="34" charset="-120"/>
+              </a:rPr>
+              <a:t>Елена</a:t>
+            </a:r>
+            <a:endParaRPr lang="en-US" sz="1300" dirty="0"/>
+          </a:p>
+        </p:txBody>
+      </p:sp>
+      <p:sp>
+        <p:nvSpPr>
+          <p:cNvPr id="23" name="Text 21"/>
+          <p:cNvSpPr/>
+          <p:nvPr/>
+        </p:nvSpPr>
+        <p:spPr>
+          <a:xfrm>
+            <a:off x="2697480" y="2706624"/>
+            <a:ext cx="1188720" cy="402336"/>
+          </a:xfrm>
+          <a:prstGeom prst="rect">
+            <a:avLst/>
+          </a:prstGeom>
+          <a:noFill/>
+          <a:ln/>
+        </p:spPr>
+        <p:txBody>
+          <a:bodyPr wrap="square" lIns="0" tIns="0" rIns="0" bIns="0" rtlCol="0" anchor="ctr"/>
+          <a:lstStyle/>
+          <a:p>
+            <a:pPr algn="ctr" indent="0" marL="0">
+              <a:buNone/>
+            </a:pPr>
+            <a:r>
+              <a:rPr lang="en-US" sz="1300" dirty="0">
+                <a:solidFill>
+                  <a:srgbClr val="7B7796"/>
+                </a:solidFill>
+                <a:latin typeface="Arial" pitchFamily="34" charset="0"/>
+                <a:ea typeface="Arial" pitchFamily="34" charset="-122"/>
+                <a:cs typeface="Arial" pitchFamily="34" charset="-120"/>
+              </a:rPr>
+              <a:t>151</a:t>
+            </a:r>
+            <a:endParaRPr lang="en-US" sz="1300" dirty="0"/>
+          </a:p>
+        </p:txBody>
+      </p:sp>
+      <p:sp>
+        <p:nvSpPr>
+          <p:cNvPr id="24" name="Text 22"/>
+          <p:cNvSpPr/>
+          <p:nvPr/>
+        </p:nvSpPr>
+        <p:spPr>
+          <a:xfrm>
+            <a:off x="3886200" y="2706624"/>
+            <a:ext cx="1188720" cy="402336"/>
+          </a:xfrm>
+          <a:prstGeom prst="rect">
+            <a:avLst/>
+          </a:prstGeom>
+          <a:noFill/>
+          <a:ln/>
+        </p:spPr>
+        <p:txBody>
+          <a:bodyPr wrap="square" lIns="0" tIns="0" rIns="0" bIns="0" rtlCol="0" anchor="ctr"/>
+          <a:lstStyle/>
+          <a:p>
+            <a:pPr algn="ctr" indent="0" marL="0">
+              <a:buNone/>
+            </a:pPr>
+            <a:r>
+              <a:rPr lang="en-US" sz="1300" b="1" dirty="0">
+                <a:solidFill>
+                  <a:srgbClr val="312783"/>
+                </a:solidFill>
+                <a:latin typeface="Arial" pitchFamily="34" charset="0"/>
+                <a:ea typeface="Arial" pitchFamily="34" charset="-122"/>
+                <a:cs typeface="Arial" pitchFamily="34" charset="-120"/>
+              </a:rPr>
+              <a:t>84</a:t>
+            </a:r>
+            <a:endParaRPr lang="en-US" sz="1300" dirty="0"/>
+          </a:p>
+        </p:txBody>
+      </p:sp>
+      <p:sp>
+        <p:nvSpPr>
+          <p:cNvPr id="25" name="Text 23"/>
+          <p:cNvSpPr/>
+          <p:nvPr/>
+        </p:nvSpPr>
+        <p:spPr>
+          <a:xfrm>
+            <a:off x="5074920" y="2706624"/>
+            <a:ext cx="1463040" cy="402336"/>
+          </a:xfrm>
+          <a:prstGeom prst="rect">
+            <a:avLst/>
+          </a:prstGeom>
+          <a:noFill/>
+          <a:ln/>
+        </p:spPr>
+        <p:txBody>
+          <a:bodyPr wrap="square" lIns="0" tIns="0" rIns="0" bIns="0" rtlCol="0" anchor="ctr"/>
+          <a:lstStyle/>
+          <a:p>
+            <a:pPr algn="ctr" indent="0" marL="0">
+              <a:buNone/>
+            </a:pPr>
+            <a:r>
+              <a:rPr lang="en-US" sz="1300" b="1" dirty="0">
+                <a:solidFill>
+                  <a:srgbClr val="7DB928"/>
+                </a:solidFill>
+                <a:latin typeface="Arial" pitchFamily="34" charset="0"/>
+                <a:ea typeface="Arial" pitchFamily="34" charset="-122"/>
+                <a:cs typeface="Arial" pitchFamily="34" charset="-120"/>
+              </a:rPr>
+              <a:t>−67</a:t>
+            </a:r>
+            <a:endParaRPr lang="en-US" sz="1300" dirty="0"/>
+          </a:p>
+        </p:txBody>
+      </p:sp>
+      <p:sp>
+        <p:nvSpPr>
+          <p:cNvPr id="26" name="Shape 24"/>
+          <p:cNvSpPr/>
+          <p:nvPr/>
+        </p:nvSpPr>
+        <p:spPr>
+          <a:xfrm>
+            <a:off x="502920" y="3108960"/>
+            <a:ext cx="6035040" cy="402336"/>
+          </a:xfrm>
+          <a:prstGeom prst="rect">
+            <a:avLst/>
+          </a:prstGeom>
+          <a:solidFill>
+            <a:srgbClr val="FFFFFF"/>
+          </a:solidFill>
+          <a:ln w="12700">
+            <a:solidFill>
+              <a:srgbClr val="DCE0F0"/>
+            </a:solidFill>
+            <a:prstDash val="solid"/>
+          </a:ln>
+        </p:spPr>
+      </p:sp>
+      <p:sp>
+        <p:nvSpPr>
+          <p:cNvPr id="27" name="Text 25"/>
+          <p:cNvSpPr/>
+          <p:nvPr/>
+        </p:nvSpPr>
+        <p:spPr>
+          <a:xfrm>
+            <a:off x="667512" y="3108960"/>
+            <a:ext cx="2029968" cy="402336"/>
+          </a:xfrm>
+          <a:prstGeom prst="rect">
+            <a:avLst/>
+          </a:prstGeom>
+          <a:noFill/>
+          <a:ln/>
+        </p:spPr>
+        <p:txBody>
+          <a:bodyPr wrap="square" lIns="0" tIns="0" rIns="0" bIns="0" rtlCol="0" anchor="ctr"/>
+          <a:lstStyle/>
+          <a:p>
+            <a:pPr indent="0" marL="0">
+              <a:buNone/>
+            </a:pPr>
+            <a:r>
+              <a:rPr lang="en-US" sz="1300" b="1" dirty="0">
+                <a:solidFill>
+                  <a:srgbClr val="241C5C"/>
+                </a:solidFill>
+                <a:latin typeface="Calibri" pitchFamily="34" charset="0"/>
+                <a:ea typeface="Calibri" pitchFamily="34" charset="-122"/>
+                <a:cs typeface="Calibri" pitchFamily="34" charset="-120"/>
+              </a:rPr>
+              <a:t>Елизавета</a:t>
+            </a:r>
+            <a:endParaRPr lang="en-US" sz="1300" dirty="0"/>
+          </a:p>
+        </p:txBody>
+      </p:sp>
+      <p:sp>
+        <p:nvSpPr>
+          <p:cNvPr id="28" name="Text 26"/>
+          <p:cNvSpPr/>
+          <p:nvPr/>
+        </p:nvSpPr>
+        <p:spPr>
+          <a:xfrm>
+            <a:off x="2697480" y="3108960"/>
+            <a:ext cx="1188720" cy="402336"/>
+          </a:xfrm>
+          <a:prstGeom prst="rect">
+            <a:avLst/>
+          </a:prstGeom>
+          <a:noFill/>
+          <a:ln/>
+        </p:spPr>
+        <p:txBody>
+          <a:bodyPr wrap="square" lIns="0" tIns="0" rIns="0" bIns="0" rtlCol="0" anchor="ctr"/>
+          <a:lstStyle/>
+          <a:p>
+            <a:pPr algn="ctr" indent="0" marL="0">
+              <a:buNone/>
+            </a:pPr>
+            <a:r>
+              <a:rPr lang="en-US" sz="1300" dirty="0">
+                <a:solidFill>
+                  <a:srgbClr val="7B7796"/>
+                </a:solidFill>
+                <a:latin typeface="Arial" pitchFamily="34" charset="0"/>
+                <a:ea typeface="Arial" pitchFamily="34" charset="-122"/>
+                <a:cs typeface="Arial" pitchFamily="34" charset="-120"/>
+              </a:rPr>
+              <a:t>365</a:t>
+            </a:r>
+            <a:endParaRPr lang="en-US" sz="1300" dirty="0"/>
+          </a:p>
+        </p:txBody>
+      </p:sp>
+      <p:sp>
+        <p:nvSpPr>
+          <p:cNvPr id="29" name="Text 27"/>
+          <p:cNvSpPr/>
+          <p:nvPr/>
+        </p:nvSpPr>
+        <p:spPr>
+          <a:xfrm>
+            <a:off x="3886200" y="3108960"/>
+            <a:ext cx="1188720" cy="402336"/>
+          </a:xfrm>
+          <a:prstGeom prst="rect">
+            <a:avLst/>
+          </a:prstGeom>
+          <a:noFill/>
+          <a:ln/>
+        </p:spPr>
+        <p:txBody>
+          <a:bodyPr wrap="square" lIns="0" tIns="0" rIns="0" bIns="0" rtlCol="0" anchor="ctr"/>
+          <a:lstStyle/>
+          <a:p>
+            <a:pPr algn="ctr" indent="0" marL="0">
+              <a:buNone/>
+            </a:pPr>
+            <a:r>
+              <a:rPr lang="en-US" sz="1300" b="1" dirty="0">
+                <a:solidFill>
+                  <a:srgbClr val="312783"/>
+                </a:solidFill>
+                <a:latin typeface="Arial" pitchFamily="34" charset="0"/>
+                <a:ea typeface="Arial" pitchFamily="34" charset="-122"/>
+                <a:cs typeface="Arial" pitchFamily="34" charset="-120"/>
+              </a:rPr>
+              <a:t>283</a:t>
+            </a:r>
+            <a:endParaRPr lang="en-US" sz="1300" dirty="0"/>
+          </a:p>
+        </p:txBody>
+      </p:sp>
+      <p:sp>
+        <p:nvSpPr>
+          <p:cNvPr id="30" name="Text 28"/>
+          <p:cNvSpPr/>
+          <p:nvPr/>
+        </p:nvSpPr>
+        <p:spPr>
+          <a:xfrm>
+            <a:off x="5074920" y="3108960"/>
+            <a:ext cx="1463040" cy="402336"/>
+          </a:xfrm>
+          <a:prstGeom prst="rect">
+            <a:avLst/>
+          </a:prstGeom>
+          <a:noFill/>
+          <a:ln/>
+        </p:spPr>
+        <p:txBody>
+          <a:bodyPr wrap="square" lIns="0" tIns="0" rIns="0" bIns="0" rtlCol="0" anchor="ctr"/>
+          <a:lstStyle/>
+          <a:p>
+            <a:pPr algn="ctr" indent="0" marL="0">
+              <a:buNone/>
+            </a:pPr>
+            <a:r>
+              <a:rPr lang="en-US" sz="1300" b="1" dirty="0">
+                <a:solidFill>
+                  <a:srgbClr val="7DB928"/>
+                </a:solidFill>
+                <a:latin typeface="Arial" pitchFamily="34" charset="0"/>
+                <a:ea typeface="Arial" pitchFamily="34" charset="-122"/>
+                <a:cs typeface="Arial" pitchFamily="34" charset="-120"/>
+              </a:rPr>
+              <a:t>−82</a:t>
+            </a:r>
+            <a:endParaRPr lang="en-US" sz="1300" dirty="0"/>
+          </a:p>
+        </p:txBody>
+      </p:sp>
+      <p:sp>
+        <p:nvSpPr>
+          <p:cNvPr id="31" name="Shape 29"/>
+          <p:cNvSpPr/>
+          <p:nvPr/>
+        </p:nvSpPr>
+        <p:spPr>
+          <a:xfrm>
+            <a:off x="502920" y="3511296"/>
+            <a:ext cx="6035040" cy="402336"/>
+          </a:xfrm>
+          <a:prstGeom prst="rect">
+            <a:avLst/>
+          </a:prstGeom>
+          <a:solidFill>
+            <a:srgbClr val="E9F5FD"/>
+          </a:solidFill>
+          <a:ln w="12700">
+            <a:solidFill>
+              <a:srgbClr val="DCE0F0"/>
+            </a:solidFill>
+            <a:prstDash val="solid"/>
+          </a:ln>
+        </p:spPr>
+      </p:sp>
+      <p:sp>
+        <p:nvSpPr>
+          <p:cNvPr id="32" name="Text 30"/>
+          <p:cNvSpPr/>
+          <p:nvPr/>
+        </p:nvSpPr>
+        <p:spPr>
+          <a:xfrm>
+            <a:off x="667512" y="3511296"/>
+            <a:ext cx="2029968" cy="402336"/>
+          </a:xfrm>
+          <a:prstGeom prst="rect">
+            <a:avLst/>
+          </a:prstGeom>
+          <a:noFill/>
+          <a:ln/>
+        </p:spPr>
+        <p:txBody>
+          <a:bodyPr wrap="square" lIns="0" tIns="0" rIns="0" bIns="0" rtlCol="0" anchor="ctr"/>
+          <a:lstStyle/>
+          <a:p>
+            <a:pPr indent="0" marL="0">
+              <a:buNone/>
+            </a:pPr>
+            <a:r>
+              <a:rPr lang="en-US" sz="1300" b="1" dirty="0">
+                <a:solidFill>
+                  <a:srgbClr val="312783"/>
+                </a:solidFill>
+                <a:latin typeface="Calibri" pitchFamily="34" charset="0"/>
+                <a:ea typeface="Calibri" pitchFamily="34" charset="-122"/>
+                <a:cs typeface="Calibri" pitchFamily="34" charset="-120"/>
+              </a:rPr>
+              <a:t>Всего</a:t>
+            </a:r>
+            <a:endParaRPr lang="en-US" sz="1300" dirty="0"/>
+          </a:p>
+        </p:txBody>
+      </p:sp>
+      <p:sp>
+        <p:nvSpPr>
+          <p:cNvPr id="33" name="Text 31"/>
+          <p:cNvSpPr/>
+          <p:nvPr/>
+        </p:nvSpPr>
+        <p:spPr>
+          <a:xfrm>
+            <a:off x="2697480" y="3511296"/>
+            <a:ext cx="1188720" cy="402336"/>
+          </a:xfrm>
+          <a:prstGeom prst="rect">
+            <a:avLst/>
+          </a:prstGeom>
+          <a:noFill/>
+          <a:ln/>
+        </p:spPr>
+        <p:txBody>
+          <a:bodyPr wrap="square" lIns="0" tIns="0" rIns="0" bIns="0" rtlCol="0" anchor="ctr"/>
+          <a:lstStyle/>
+          <a:p>
+            <a:pPr algn="ctr" indent="0" marL="0">
+              <a:buNone/>
+            </a:pPr>
+            <a:r>
+              <a:rPr lang="en-US" sz="1300" b="1" dirty="0">
+                <a:solidFill>
+                  <a:srgbClr val="7B7796"/>
+                </a:solidFill>
+                <a:latin typeface="Arial" pitchFamily="34" charset="0"/>
+                <a:ea typeface="Arial" pitchFamily="34" charset="-122"/>
+                <a:cs typeface="Arial" pitchFamily="34" charset="-120"/>
+              </a:rPr>
+              <a:t>977</a:t>
+            </a:r>
+            <a:endParaRPr lang="en-US" sz="1300" dirty="0"/>
+          </a:p>
+        </p:txBody>
+      </p:sp>
+      <p:sp>
+        <p:nvSpPr>
+          <p:cNvPr id="34" name="Text 32"/>
+          <p:cNvSpPr/>
+          <p:nvPr/>
+        </p:nvSpPr>
+        <p:spPr>
+          <a:xfrm>
+            <a:off x="3886200" y="3511296"/>
+            <a:ext cx="1188720" cy="402336"/>
+          </a:xfrm>
+          <a:prstGeom prst="rect">
+            <a:avLst/>
+          </a:prstGeom>
+          <a:noFill/>
+          <a:ln/>
+        </p:spPr>
+        <p:txBody>
+          <a:bodyPr wrap="square" lIns="0" tIns="0" rIns="0" bIns="0" rtlCol="0" anchor="ctr"/>
+          <a:lstStyle/>
+          <a:p>
+            <a:pPr algn="ctr" indent="0" marL="0">
+              <a:buNone/>
+            </a:pPr>
+            <a:r>
+              <a:rPr lang="en-US" sz="1300" b="1" dirty="0">
+                <a:solidFill>
+                  <a:srgbClr val="312783"/>
+                </a:solidFill>
+                <a:latin typeface="Arial" pitchFamily="34" charset="0"/>
+                <a:ea typeface="Arial" pitchFamily="34" charset="-122"/>
+                <a:cs typeface="Arial" pitchFamily="34" charset="-120"/>
+              </a:rPr>
+              <a:t>548</a:t>
+            </a:r>
+            <a:endParaRPr lang="en-US" sz="1300" dirty="0"/>
+          </a:p>
+        </p:txBody>
+      </p:sp>
+      <p:sp>
+        <p:nvSpPr>
+          <p:cNvPr id="35" name="Text 33"/>
+          <p:cNvSpPr/>
+          <p:nvPr/>
+        </p:nvSpPr>
+        <p:spPr>
+          <a:xfrm>
+            <a:off x="5074920" y="3511296"/>
+            <a:ext cx="1463040" cy="402336"/>
+          </a:xfrm>
+          <a:prstGeom prst="rect">
+            <a:avLst/>
+          </a:prstGeom>
+          <a:noFill/>
+          <a:ln/>
+        </p:spPr>
+        <p:txBody>
+          <a:bodyPr wrap="square" lIns="0" tIns="0" rIns="0" bIns="0" rtlCol="0" anchor="ctr"/>
+          <a:lstStyle/>
+          <a:p>
+            <a:pPr algn="ctr" indent="0" marL="0">
+              <a:buNone/>
+            </a:pPr>
+            <a:r>
+              <a:rPr lang="en-US" sz="1300" b="1" dirty="0">
+                <a:solidFill>
+                  <a:srgbClr val="7DB928"/>
+                </a:solidFill>
+                <a:latin typeface="Arial" pitchFamily="34" charset="0"/>
+                <a:ea typeface="Arial" pitchFamily="34" charset="-122"/>
+                <a:cs typeface="Arial" pitchFamily="34" charset="-120"/>
+              </a:rPr>
+              <a:t>−429</a:t>
+            </a:r>
+            <a:endParaRPr lang="en-US" sz="1300" dirty="0"/>
+          </a:p>
+        </p:txBody>
+      </p:sp>
+      <p:sp>
+        <p:nvSpPr>
+          <p:cNvPr id="36" name="Shape 34"/>
           <p:cNvSpPr/>
           <p:nvPr/>
         </p:nvSpPr>
@@ -20183,7 +19702,7 @@
       </p:sp>
       <p:sp>
         <p:nvSpPr>
-          <p:cNvPr id="8" name="Text 5"/>
+          <p:cNvPr id="37" name="Text 35"/>
           <p:cNvSpPr/>
           <p:nvPr/>
         </p:nvSpPr>
@@ -20242,7 +19761,7 @@
       </p:sp>
       <p:sp>
         <p:nvSpPr>
-          <p:cNvPr id="9" name="Shape 6"/>
+          <p:cNvPr id="38" name="Shape 36"/>
           <p:cNvSpPr/>
           <p:nvPr/>
         </p:nvSpPr>
@@ -20276,7 +19795,7 @@
       </p:sp>
       <p:sp>
         <p:nvSpPr>
-          <p:cNvPr id="10" name="Text 7"/>
+          <p:cNvPr id="39" name="Text 37"/>
           <p:cNvSpPr/>
           <p:nvPr/>
         </p:nvSpPr>
@@ -20315,7 +19834,7 @@
       </p:sp>
       <p:sp>
         <p:nvSpPr>
-          <p:cNvPr id="11" name="Shape 8"/>
+          <p:cNvPr id="40" name="Shape 38"/>
           <p:cNvSpPr/>
           <p:nvPr/>
         </p:nvSpPr>
@@ -20349,7 +19868,7 @@
       </p:sp>
       <p:sp>
         <p:nvSpPr>
-          <p:cNvPr id="12" name="Text 9"/>
+          <p:cNvPr id="41" name="Text 39"/>
           <p:cNvSpPr/>
           <p:nvPr/>
         </p:nvSpPr>
@@ -20416,7 +19935,7 @@
       </p:sp>
       <p:sp>
         <p:nvSpPr>
-          <p:cNvPr id="13" name="Text 10"/>
+          <p:cNvPr id="42" name="Text 40"/>
           <p:cNvSpPr/>
           <p:nvPr/>
         </p:nvSpPr>
@@ -20455,7 +19974,7 @@
       </p:sp>
       <p:sp>
         <p:nvSpPr>
-          <p:cNvPr id="14" name="Shape 11"/>
+          <p:cNvPr id="43" name="Shape 41"/>
           <p:cNvSpPr/>
           <p:nvPr/>
         </p:nvSpPr>
@@ -20489,7 +20008,7 @@
       </p:sp>
       <p:sp>
         <p:nvSpPr>
-          <p:cNvPr id="15" name="Text 12"/>
+          <p:cNvPr id="44" name="Text 42"/>
           <p:cNvSpPr/>
           <p:nvPr/>
         </p:nvSpPr>
@@ -20528,7 +20047,7 @@
       </p:sp>
       <p:sp>
         <p:nvSpPr>
-          <p:cNvPr id="16" name="Text 13"/>
+          <p:cNvPr id="45" name="Text 43"/>
           <p:cNvSpPr/>
           <p:nvPr/>
         </p:nvSpPr>
@@ -20570,7 +20089,7 @@
       </p:sp>
       <p:sp>
         <p:nvSpPr>
-          <p:cNvPr id="17" name="Shape 14"/>
+          <p:cNvPr id="46" name="Shape 44"/>
           <p:cNvSpPr/>
           <p:nvPr/>
         </p:nvSpPr>
@@ -20604,7 +20123,7 @@
       </p:sp>
       <p:sp>
         <p:nvSpPr>
-          <p:cNvPr id="18" name="Text 15"/>
+          <p:cNvPr id="47" name="Text 45"/>
           <p:cNvSpPr/>
           <p:nvPr/>
         </p:nvSpPr>
@@ -20643,7 +20162,7 @@
       </p:sp>
       <p:sp>
         <p:nvSpPr>
-          <p:cNvPr id="19" name="Text 16"/>
+          <p:cNvPr id="48" name="Text 46"/>
           <p:cNvSpPr/>
           <p:nvPr/>
         </p:nvSpPr>
@@ -20685,7 +20204,7 @@
       </p:sp>
       <p:sp>
         <p:nvSpPr>
-          <p:cNvPr id="20" name="Shape 17"/>
+          <p:cNvPr id="49" name="Shape 47"/>
           <p:cNvSpPr/>
           <p:nvPr/>
         </p:nvSpPr>
@@ -20719,7 +20238,7 @@
       </p:sp>
       <p:sp>
         <p:nvSpPr>
-          <p:cNvPr id="21" name="Text 18"/>
+          <p:cNvPr id="50" name="Text 48"/>
           <p:cNvSpPr/>
           <p:nvPr/>
         </p:nvSpPr>
@@ -20758,7 +20277,7 @@
       </p:sp>
       <p:sp>
         <p:nvSpPr>
-          <p:cNvPr id="22" name="Text 19"/>
+          <p:cNvPr id="51" name="Text 49"/>
           <p:cNvSpPr/>
           <p:nvPr/>
         </p:nvSpPr>
@@ -20792,7 +20311,7 @@
                 <a:ea typeface="Calibri" pitchFamily="34" charset="-122"/>
                 <a:cs typeface="Calibri" pitchFamily="34" charset="-120"/>
               </a:rPr>
-              <a:t>закрыто — делать было нечего</a:t>
+              <a:t>закрыто — дел не было</a:t>
             </a:r>
             <a:endParaRPr lang="en-US" sz="1150" dirty="0"/>
           </a:p>
@@ -20800,7 +20319,7 @@
       </p:sp>
       <p:sp>
         <p:nvSpPr>
-          <p:cNvPr id="23" name="Shape 20"/>
+          <p:cNvPr id="52" name="Shape 50"/>
           <p:cNvSpPr/>
           <p:nvPr/>
         </p:nvSpPr>
@@ -20834,7 +20353,7 @@
       </p:sp>
       <p:sp>
         <p:nvSpPr>
-          <p:cNvPr id="24" name="Text 21"/>
+          <p:cNvPr id="53" name="Text 51"/>
           <p:cNvSpPr/>
           <p:nvPr/>
         </p:nvSpPr>
@@ -20873,7 +20392,7 @@
       </p:sp>
       <p:sp>
         <p:nvSpPr>
-          <p:cNvPr id="25" name="Text 22"/>
+          <p:cNvPr id="54" name="Text 52"/>
           <p:cNvSpPr/>
           <p:nvPr/>
         </p:nvSpPr>
@@ -20915,7 +20434,7 @@
       </p:sp>
       <p:sp>
         <p:nvSpPr>
-          <p:cNvPr id="26" name="Shape 23"/>
+          <p:cNvPr id="55" name="Shape 53"/>
           <p:cNvSpPr/>
           <p:nvPr/>
         </p:nvSpPr>
@@ -20949,7 +20468,7 @@
       </p:sp>
       <p:sp>
         <p:nvSpPr>
-          <p:cNvPr id="27" name="Text 24"/>
+          <p:cNvPr id="56" name="Text 54"/>
           <p:cNvSpPr/>
           <p:nvPr/>
         </p:nvSpPr>
@@ -21019,8 +20538,8 @@
         </p:nvSpPr>
         <p:spPr>
           <a:xfrm>
-            <a:off x="502920" y="365760"/>
-            <a:ext cx="585216" cy="585216"/>
+            <a:off x="502920" y="402336"/>
+            <a:ext cx="603504" cy="603504"/>
           </a:xfrm>
           <a:prstGeom prst="ellipse">
             <a:avLst/>
@@ -21039,8 +20558,8 @@
         </p:nvSpPr>
         <p:spPr>
           <a:xfrm>
-            <a:off x="502920" y="365760"/>
-            <a:ext cx="585216" cy="585216"/>
+            <a:off x="502920" y="402336"/>
+            <a:ext cx="603504" cy="603504"/>
           </a:xfrm>
           <a:prstGeom prst="rect">
             <a:avLst/>
@@ -21078,8 +20597,8 @@
         </p:nvSpPr>
         <p:spPr>
           <a:xfrm>
-            <a:off x="1261872" y="347472"/>
-            <a:ext cx="10332720" cy="274320"/>
+            <a:off x="1261872" y="310896"/>
+            <a:ext cx="10332720" cy="256032"/>
           </a:xfrm>
           <a:prstGeom prst="rect">
             <a:avLst/>
@@ -21117,24 +20636,24 @@
         </p:nvSpPr>
         <p:spPr>
           <a:xfrm>
-            <a:off x="1261872" y="603504"/>
-            <a:ext cx="10424160" cy="512064"/>
-          </a:xfrm>
-          <a:prstGeom prst="rect">
-            <a:avLst/>
-          </a:prstGeom>
-          <a:noFill/>
-          <a:ln/>
-        </p:spPr>
-        <p:txBody>
-          <a:bodyPr wrap="square" lIns="0" tIns="0" rIns="0" bIns="0" rtlCol="0" anchor="ctr"/>
-          <a:lstStyle/>
-          <a:p>
-            <a:pPr indent="0" marL="0">
-              <a:buNone/>
-            </a:pPr>
-            <a:r>
-              <a:rPr lang="en-US" sz="3000" b="1" dirty="0">
+            <a:off x="1261872" y="585216"/>
+            <a:ext cx="10515600" cy="566928"/>
+          </a:xfrm>
+          <a:prstGeom prst="rect">
+            <a:avLst/>
+          </a:prstGeom>
+          <a:noFill/>
+          <a:ln/>
+        </p:spPr>
+        <p:txBody>
+          <a:bodyPr wrap="square" lIns="0" tIns="0" rIns="0" bIns="0" rtlCol="0" anchor="ctr"/>
+          <a:lstStyle/>
+          <a:p>
+            <a:pPr indent="0" marL="0">
+              <a:buNone/>
+            </a:pPr>
+            <a:r>
+              <a:rPr lang="en-US" sz="2800" b="1" dirty="0">
                 <a:solidFill>
                   <a:srgbClr val="312783"/>
                 </a:solidFill>
@@ -21142,9 +20661,9 @@
                 <a:ea typeface="Calibri" pitchFamily="34" charset="-122"/>
                 <a:cs typeface="Calibri" pitchFamily="34" charset="-120"/>
               </a:rPr>
-              <a:t>Пересчитывает то, что раньше не пересчитывал никто</a:t>
-            </a:r>
-            <a:endParaRPr lang="en-US" sz="3000" dirty="0"/>
+              <a:t>Считает то, что раньше не считал никто</a:t>
+            </a:r>
+            <a:endParaRPr lang="en-US" sz="2800" dirty="0"/>
           </a:p>
         </p:txBody>
       </p:sp>
@@ -22106,7 +21625,7 @@
             <a:r>
               <a:rPr lang="en-US" sz="1100" dirty="0">
                 <a:solidFill>
-                  <a:srgbClr val="7B7796"/>
+                  <a:srgbClr val="45415F"/>
                 </a:solidFill>
                 <a:latin typeface="Calibri" pitchFamily="34" charset="0"/>
                 <a:ea typeface="Calibri" pitchFamily="34" charset="-122"/>

--- a/app/static/slides_ai_kidsup.pptx
+++ b/app/static/slides_ai_kidsup.pptx
@@ -7415,7 +7415,7 @@
                 <a:ea typeface="Calibri" pitchFamily="34" charset="-122"/>
                 <a:cs typeface="Calibri" pitchFamily="34" charset="-120"/>
               </a:rPr>
-              <a:t>список задач одного администратора за одну неделю</a:t>
+              <a:t>задач на сегодня у администратора вместо списка из 208</a:t>
             </a:r>
             <a:endParaRPr lang="en-US" sz="1100" dirty="0"/>
           </a:p>
@@ -9552,7 +9552,7 @@
                 <a:ea typeface="Calibri" pitchFamily="34" charset="-122"/>
                 <a:cs typeface="Calibri" pitchFamily="34" charset="-120"/>
               </a:rPr>
-              <a:t>Администратор три набора своей смены в решающую неделю потратила на тестовые номера, забытые в списке обзвона. Это моя ошибка, и она записана.</a:t>
+              <a:t>Три набора номера в решающую неделю ушли в никуда: администратор звонила на тестовые карточки, которые я завёл при проверке форм и забыл убрать из обзвона. Это моя ошибка, и она записана.</a:t>
             </a:r>
             <a:endParaRPr lang="en-US" sz="1250" dirty="0"/>
           </a:p>
@@ -12162,7 +12162,7 @@
                 <a:ea typeface="Calibri" pitchFamily="34" charset="-122"/>
                 <a:cs typeface="Calibri" pitchFamily="34" charset="-120"/>
               </a:rPr>
-              <a:t>заполненность на старте разговора</a:t>
+              <a:t>заполненность групп на 20 августа</a:t>
             </a:r>
             <a:endParaRPr lang="en-US" sz="1150" dirty="0"/>
           </a:p>
@@ -18211,7 +18211,7 @@
                 <a:ea typeface="Calibri" pitchFamily="34" charset="-122"/>
                 <a:cs typeface="Calibri" pitchFamily="34" charset="-120"/>
               </a:rPr>
-              <a:t>📞 Тучин Марк, 5 л., ходил на подготовку к школе до мая. Предложить: ПкШ + гарантия чтения. Ни разу не звонили. Зови на 29–30.08 и Неделю уроков 31.08–06.09.</a:t>
+              <a:t>📞 Марк, 5 л., ходил на подготовку к школе до мая. Предложить: ПкШ + гарантия чтения. Ни разу не звонили. Зови на 29–30.08 и Неделю уроков 31.08–06.09.</a:t>
             </a:r>
             <a:endParaRPr lang="en-US" sz="1250" dirty="0"/>
           </a:p>
@@ -18669,7 +18669,7 @@
               <a:buNone/>
             </a:pPr>
             <a:r>
-              <a:rPr lang="en-US" sz="1250" b="1" dirty="0">
+              <a:rPr lang="en-US" sz="1050" b="1" dirty="0">
                 <a:solidFill>
                   <a:srgbClr val="FFFFFF"/>
                 </a:solidFill>
@@ -18677,9 +18677,9 @@
                 <a:ea typeface="Calibri" pitchFamily="34" charset="-122"/>
                 <a:cs typeface="Calibri" pitchFamily="34" charset="-120"/>
               </a:rPr>
-              <a:t>Было</a:t>
-            </a:r>
-            <a:endParaRPr lang="en-US" sz="1250" dirty="0"/>
+              <a:t>Открытых было</a:t>
+            </a:r>
+            <a:endParaRPr lang="en-US" sz="1050" dirty="0"/>
           </a:p>
         </p:txBody>
       </p:sp>
@@ -18708,7 +18708,7 @@
               <a:buNone/>
             </a:pPr>
             <a:r>
-              <a:rPr lang="en-US" sz="1250" b="1" dirty="0">
+              <a:rPr lang="en-US" sz="1050" b="1" dirty="0">
                 <a:solidFill>
                   <a:srgbClr val="FFFFFF"/>
                 </a:solidFill>
@@ -18716,9 +18716,9 @@
                 <a:ea typeface="Calibri" pitchFamily="34" charset="-122"/>
                 <a:cs typeface="Calibri" pitchFamily="34" charset="-120"/>
               </a:rPr>
-              <a:t>Стало</a:t>
-            </a:r>
-            <a:endParaRPr lang="en-US" sz="1250" dirty="0"/>
+              <a:t>Открытых стало</a:t>
+            </a:r>
+            <a:endParaRPr lang="en-US" sz="1050" dirty="0"/>
           </a:p>
         </p:txBody>
       </p:sp>
@@ -19966,7 +19966,7 @@
                 <a:ea typeface="Calibri" pitchFamily="34" charset="-122"/>
                 <a:cs typeface="Calibri" pitchFamily="34" charset="-120"/>
               </a:rPr>
-              <a:t>столько задач в списке у одного администратора сегодня — вместо неподъёмных двухсот</a:t>
+              <a:t>задач у Ирины на сегодня — из 73 открытых. Остальные стоят на своих датах, а не висят одним списком</a:t>
             </a:r>
             <a:endParaRPr lang="en-US" sz="1150" dirty="0"/>
           </a:p>
